--- a/week report/8.11 report.pptx
+++ b/week report/8.11 report.pptx
@@ -5,17 +5,16 @@
     <p:sldMasterId id="2147483648" r:id="rId1"/>
   </p:sldMasterIdLst>
   <p:notesMasterIdLst>
-    <p:notesMasterId r:id="rId10"/>
+    <p:notesMasterId r:id="rId9"/>
   </p:notesMasterIdLst>
   <p:sldIdLst>
     <p:sldId id="263" r:id="rId2"/>
     <p:sldId id="269" r:id="rId3"/>
-    <p:sldId id="275" r:id="rId4"/>
-    <p:sldId id="265" r:id="rId5"/>
-    <p:sldId id="268" r:id="rId6"/>
-    <p:sldId id="273" r:id="rId7"/>
-    <p:sldId id="274" r:id="rId8"/>
-    <p:sldId id="264" r:id="rId9"/>
+    <p:sldId id="268" r:id="rId4"/>
+    <p:sldId id="275" r:id="rId5"/>
+    <p:sldId id="273" r:id="rId6"/>
+    <p:sldId id="274" r:id="rId7"/>
+    <p:sldId id="264" r:id="rId8"/>
   </p:sldIdLst>
   <p:sldSz cx="12192000" cy="6858000"/>
   <p:notesSz cx="6858000" cy="9144000"/>
@@ -204,7 +203,7 @@
           <a:p>
             <a:fld id="{F4BC8E43-2426-4AB4-B1DA-94A32D613D40}" type="datetimeFigureOut">
               <a:rPr lang="zh-CN" altLang="en-US" smtClean="0"/>
-              <a:t>2021/8/8</a:t>
+              <a:t>2021/8/10</a:t>
             </a:fld>
             <a:endParaRPr lang="zh-CN" altLang="en-US"/>
           </a:p>
@@ -604,10 +603,6 @@
           <a:bodyPr/>
           <a:lstStyle/>
           <a:p>
-            <a:r>
-              <a:rPr lang="en-US" altLang="zh-CN" dirty="0" smtClean="0"/>
-              <a:t>A HIERARCHICAL MODEL FOR DEVICE PLACEMENT2018</a:t>
-            </a:r>
             <a:endParaRPr lang="zh-CN" altLang="en-US" dirty="0"/>
           </a:p>
         </p:txBody>
@@ -638,7 +633,7 @@
     </p:spTree>
     <p:extLst>
       <p:ext uri="{BB962C8B-B14F-4D97-AF65-F5344CB8AC3E}">
-        <p14:creationId xmlns:p14="http://schemas.microsoft.com/office/powerpoint/2010/main" val="2185586468"/>
+        <p14:creationId xmlns:p14="http://schemas.microsoft.com/office/powerpoint/2010/main" val="1224871644"/>
       </p:ext>
     </p:extLst>
   </p:cSld>
@@ -713,7 +708,7 @@
           <a:p>
             <a:fld id="{5CF06ACB-586E-4135-A9BA-C2B440FB252A}" type="slidenum">
               <a:rPr lang="zh-CN" altLang="en-US" smtClean="0"/>
-              <a:t>5</a:t>
+              <a:t>4</a:t>
             </a:fld>
             <a:endParaRPr lang="zh-CN" altLang="en-US"/>
           </a:p>
@@ -722,7 +717,7 @@
     </p:spTree>
     <p:extLst>
       <p:ext uri="{BB962C8B-B14F-4D97-AF65-F5344CB8AC3E}">
-        <p14:creationId xmlns:p14="http://schemas.microsoft.com/office/powerpoint/2010/main" val="1224871644"/>
+        <p14:creationId xmlns:p14="http://schemas.microsoft.com/office/powerpoint/2010/main" val="1852752284"/>
       </p:ext>
     </p:extLst>
   </p:cSld>
@@ -797,7 +792,7 @@
           <a:p>
             <a:fld id="{5CF06ACB-586E-4135-A9BA-C2B440FB252A}" type="slidenum">
               <a:rPr lang="zh-CN" altLang="en-US" smtClean="0"/>
-              <a:t>8</a:t>
+              <a:t>7</a:t>
             </a:fld>
             <a:endParaRPr lang="zh-CN" altLang="en-US"/>
           </a:p>
@@ -947,7 +942,7 @@
           <a:p>
             <a:fld id="{DCC080BC-FD8F-4BC7-912D-250C973482EE}" type="datetimeFigureOut">
               <a:rPr lang="zh-CN" altLang="en-US" smtClean="0"/>
-              <a:t>2021/8/8</a:t>
+              <a:t>2021/8/10</a:t>
             </a:fld>
             <a:endParaRPr lang="zh-CN" altLang="en-US"/>
           </a:p>
@@ -1117,7 +1112,7 @@
           <a:p>
             <a:fld id="{DCC080BC-FD8F-4BC7-912D-250C973482EE}" type="datetimeFigureOut">
               <a:rPr lang="zh-CN" altLang="en-US" smtClean="0"/>
-              <a:t>2021/8/8</a:t>
+              <a:t>2021/8/10</a:t>
             </a:fld>
             <a:endParaRPr lang="zh-CN" altLang="en-US"/>
           </a:p>
@@ -1297,7 +1292,7 @@
           <a:p>
             <a:fld id="{DCC080BC-FD8F-4BC7-912D-250C973482EE}" type="datetimeFigureOut">
               <a:rPr lang="zh-CN" altLang="en-US" smtClean="0"/>
-              <a:t>2021/8/8</a:t>
+              <a:t>2021/8/10</a:t>
             </a:fld>
             <a:endParaRPr lang="zh-CN" altLang="en-US"/>
           </a:p>
@@ -1467,7 +1462,7 @@
           <a:p>
             <a:fld id="{DCC080BC-FD8F-4BC7-912D-250C973482EE}" type="datetimeFigureOut">
               <a:rPr lang="zh-CN" altLang="en-US" smtClean="0"/>
-              <a:t>2021/8/8</a:t>
+              <a:t>2021/8/10</a:t>
             </a:fld>
             <a:endParaRPr lang="zh-CN" altLang="en-US"/>
           </a:p>
@@ -1713,7 +1708,7 @@
           <a:p>
             <a:fld id="{DCC080BC-FD8F-4BC7-912D-250C973482EE}" type="datetimeFigureOut">
               <a:rPr lang="zh-CN" altLang="en-US" smtClean="0"/>
-              <a:t>2021/8/8</a:t>
+              <a:t>2021/8/10</a:t>
             </a:fld>
             <a:endParaRPr lang="zh-CN" altLang="en-US"/>
           </a:p>
@@ -1945,7 +1940,7 @@
           <a:p>
             <a:fld id="{DCC080BC-FD8F-4BC7-912D-250C973482EE}" type="datetimeFigureOut">
               <a:rPr lang="zh-CN" altLang="en-US" smtClean="0"/>
-              <a:t>2021/8/8</a:t>
+              <a:t>2021/8/10</a:t>
             </a:fld>
             <a:endParaRPr lang="zh-CN" altLang="en-US"/>
           </a:p>
@@ -2312,7 +2307,7 @@
           <a:p>
             <a:fld id="{DCC080BC-FD8F-4BC7-912D-250C973482EE}" type="datetimeFigureOut">
               <a:rPr lang="zh-CN" altLang="en-US" smtClean="0"/>
-              <a:t>2021/8/8</a:t>
+              <a:t>2021/8/10</a:t>
             </a:fld>
             <a:endParaRPr lang="zh-CN" altLang="en-US"/>
           </a:p>
@@ -2430,7 +2425,7 @@
           <a:p>
             <a:fld id="{DCC080BC-FD8F-4BC7-912D-250C973482EE}" type="datetimeFigureOut">
               <a:rPr lang="zh-CN" altLang="en-US" smtClean="0"/>
-              <a:t>2021/8/8</a:t>
+              <a:t>2021/8/10</a:t>
             </a:fld>
             <a:endParaRPr lang="zh-CN" altLang="en-US"/>
           </a:p>
@@ -2525,7 +2520,7 @@
           <a:p>
             <a:fld id="{DCC080BC-FD8F-4BC7-912D-250C973482EE}" type="datetimeFigureOut">
               <a:rPr lang="zh-CN" altLang="en-US" smtClean="0"/>
-              <a:t>2021/8/8</a:t>
+              <a:t>2021/8/10</a:t>
             </a:fld>
             <a:endParaRPr lang="zh-CN" altLang="en-US"/>
           </a:p>
@@ -2802,7 +2797,7 @@
           <a:p>
             <a:fld id="{DCC080BC-FD8F-4BC7-912D-250C973482EE}" type="datetimeFigureOut">
               <a:rPr lang="zh-CN" altLang="en-US" smtClean="0"/>
-              <a:t>2021/8/8</a:t>
+              <a:t>2021/8/10</a:t>
             </a:fld>
             <a:endParaRPr lang="zh-CN" altLang="en-US"/>
           </a:p>
@@ -3055,7 +3050,7 @@
           <a:p>
             <a:fld id="{DCC080BC-FD8F-4BC7-912D-250C973482EE}" type="datetimeFigureOut">
               <a:rPr lang="zh-CN" altLang="en-US" smtClean="0"/>
-              <a:t>2021/8/8</a:t>
+              <a:t>2021/8/10</a:t>
             </a:fld>
             <a:endParaRPr lang="zh-CN" altLang="en-US"/>
           </a:p>
@@ -3268,7 +3263,7 @@
           <a:p>
             <a:fld id="{DCC080BC-FD8F-4BC7-912D-250C973482EE}" type="datetimeFigureOut">
               <a:rPr lang="zh-CN" altLang="en-US" smtClean="0"/>
-              <a:t>2021/8/8</a:t>
+              <a:t>2021/8/10</a:t>
             </a:fld>
             <a:endParaRPr lang="zh-CN" altLang="en-US"/>
           </a:p>
@@ -16374,7 +16369,7 @@
           <a:p>
             <a:fld id="{7E66CBCB-337D-49B6-B73D-DC76D0E029C4}" type="datetime1">
               <a:rPr lang="zh-CN" altLang="en-US" smtClean="0"/>
-              <a:t>2021/8/8</a:t>
+              <a:t>2021/8/10</a:t>
             </a:fld>
             <a:endParaRPr lang="zh-CN" altLang="en-US" dirty="0"/>
           </a:p>
@@ -16502,17 +16497,30 @@
             </a:r>
             <a:r>
               <a:rPr lang="en-US" altLang="zh-CN" dirty="0" smtClean="0"/>
-              <a:t>.</a:t>
+              <a:t>. </a:t>
+            </a:r>
+            <a:r>
+              <a:rPr lang="zh-CN" altLang="en-US" dirty="0"/>
+              <a:t> </a:t>
+            </a:r>
+            <a:r>
+              <a:rPr lang="zh-CN" altLang="en-US" dirty="0"/>
+              <a:t>从</a:t>
+            </a:r>
+            <a:r>
+              <a:rPr lang="zh-CN" altLang="en-US" dirty="0" smtClean="0"/>
+              <a:t>他们的代码中找一些实现</a:t>
             </a:r>
             <a:r>
               <a:rPr lang="en-US" altLang="zh-CN" dirty="0" smtClean="0"/>
-              <a:t> </a:t>
+              <a:t>.</a:t>
             </a:r>
+            <a:endParaRPr lang="en-US" altLang="zh-CN" dirty="0" smtClean="0"/>
           </a:p>
           <a:p>
             <a:r>
               <a:rPr lang="zh-CN" altLang="en-US" dirty="0" smtClean="0"/>
-              <a:t>代码学习</a:t>
+              <a:t>代码</a:t>
             </a:r>
             <a:r>
               <a:rPr lang="en-US" altLang="zh-CN" dirty="0" err="1" smtClean="0"/>
@@ -16526,7 +16534,6 @@
               <a:rPr lang="en-US" altLang="zh-CN" dirty="0" smtClean="0"/>
               <a:t>. </a:t>
             </a:r>
-            <a:endParaRPr lang="en-US" altLang="zh-CN" dirty="0" smtClean="0"/>
           </a:p>
           <a:p>
             <a:pPr marL="0" indent="0">
@@ -16580,270 +16587,6 @@
             <p:ph type="title"/>
           </p:nvPr>
         </p:nvSpPr>
-        <p:spPr>
-          <a:xfrm>
-            <a:off x="838200" y="299137"/>
-            <a:ext cx="10515600" cy="1325563"/>
-          </a:xfrm>
-        </p:spPr>
-        <p:txBody>
-          <a:bodyPr/>
-          <a:lstStyle/>
-          <a:p>
-            <a:r>
-              <a:rPr lang="zh-CN" altLang="en-US" dirty="0"/>
-              <a:t>想法</a:t>
-            </a:r>
-          </a:p>
-        </p:txBody>
-      </p:sp>
-      <p:sp>
-        <p:nvSpPr>
-          <p:cNvPr id="3" name="内容占位符 2"/>
-          <p:cNvSpPr>
-            <a:spLocks noGrp="1"/>
-          </p:cNvSpPr>
-          <p:nvPr>
-            <p:ph idx="1"/>
-          </p:nvPr>
-        </p:nvSpPr>
-        <p:spPr>
-          <a:xfrm>
-            <a:off x="838200" y="1901039"/>
-            <a:ext cx="10515600" cy="4351338"/>
-          </a:xfrm>
-        </p:spPr>
-        <p:txBody>
-          <a:bodyPr/>
-          <a:lstStyle/>
-          <a:p>
-            <a:r>
-              <a:rPr lang="zh-CN" altLang="en-US" dirty="0" smtClean="0"/>
-              <a:t>根据</a:t>
-            </a:r>
-            <a:r>
-              <a:rPr lang="en-US" altLang="zh-CN" dirty="0" smtClean="0"/>
-              <a:t>hierarchy</a:t>
-            </a:r>
-            <a:r>
-              <a:rPr lang="zh-CN" altLang="en-US" dirty="0" smtClean="0"/>
-              <a:t>做游戏的</a:t>
-            </a:r>
-            <a:r>
-              <a:rPr lang="zh-CN" altLang="en-US" dirty="0"/>
-              <a:t>思想</a:t>
-            </a:r>
-            <a:r>
-              <a:rPr lang="en-US" altLang="zh-CN" dirty="0"/>
-              <a:t>, </a:t>
-            </a:r>
-            <a:r>
-              <a:rPr lang="zh-CN" altLang="en-US" dirty="0" smtClean="0"/>
-              <a:t>确定</a:t>
-            </a:r>
-            <a:r>
-              <a:rPr lang="zh-CN" altLang="en-US" dirty="0"/>
-              <a:t>一种</a:t>
-            </a:r>
-            <a:r>
-              <a:rPr lang="en-US" altLang="zh-CN" dirty="0"/>
-              <a:t>placement, </a:t>
-            </a:r>
-            <a:r>
-              <a:rPr lang="zh-CN" altLang="en-US" dirty="0" smtClean="0"/>
-              <a:t>调整</a:t>
-            </a:r>
-            <a:r>
-              <a:rPr lang="en-US" altLang="zh-CN" dirty="0" smtClean="0"/>
-              <a:t>resource allocation , resource </a:t>
-            </a:r>
-            <a:r>
-              <a:rPr lang="zh-CN" altLang="en-US" dirty="0" smtClean="0"/>
-              <a:t>作为子</a:t>
-            </a:r>
-            <a:r>
-              <a:rPr lang="en-US" altLang="zh-CN" dirty="0" smtClean="0"/>
-              <a:t>goal </a:t>
-            </a:r>
-            <a:r>
-              <a:rPr lang="zh-CN" altLang="en-US" dirty="0" smtClean="0"/>
-              <a:t>收敛了之后</a:t>
-            </a:r>
-            <a:r>
-              <a:rPr lang="en-US" altLang="zh-CN" dirty="0" smtClean="0"/>
-              <a:t>, </a:t>
-            </a:r>
-            <a:r>
-              <a:rPr lang="zh-CN" altLang="en-US" dirty="0" smtClean="0"/>
-              <a:t>更换子</a:t>
-            </a:r>
-            <a:r>
-              <a:rPr lang="en-US" altLang="zh-CN" dirty="0" smtClean="0"/>
-              <a:t>goal,</a:t>
-            </a:r>
-            <a:r>
-              <a:rPr lang="zh-CN" altLang="en-US" dirty="0" smtClean="0"/>
-              <a:t>改变</a:t>
-            </a:r>
-            <a:r>
-              <a:rPr lang="en-US" altLang="zh-CN" dirty="0" smtClean="0"/>
-              <a:t>placement. </a:t>
-            </a:r>
-            <a:r>
-              <a:rPr lang="zh-CN" altLang="en-US" dirty="0" smtClean="0"/>
-              <a:t>这个的问题在于每个</a:t>
-            </a:r>
-            <a:r>
-              <a:rPr lang="en-US" altLang="zh-CN" dirty="0" smtClean="0"/>
-              <a:t>interval </a:t>
-            </a:r>
-            <a:r>
-              <a:rPr lang="zh-CN" altLang="en-US" dirty="0" smtClean="0"/>
-              <a:t>都有</a:t>
-            </a:r>
-            <a:r>
-              <a:rPr lang="en-US" altLang="zh-CN" dirty="0" smtClean="0"/>
-              <a:t>job</a:t>
-            </a:r>
-            <a:r>
-              <a:rPr lang="zh-CN" altLang="en-US" dirty="0" smtClean="0"/>
-              <a:t>进来</a:t>
-            </a:r>
-            <a:r>
-              <a:rPr lang="en-US" altLang="zh-CN" dirty="0" smtClean="0"/>
-              <a:t>.</a:t>
-            </a:r>
-            <a:r>
-              <a:rPr lang="zh-CN" altLang="en-US" dirty="0" smtClean="0"/>
-              <a:t>这个是行不通的</a:t>
-            </a:r>
-            <a:r>
-              <a:rPr lang="en-US" altLang="zh-CN" dirty="0" smtClean="0"/>
-              <a:t>.</a:t>
-            </a:r>
-          </a:p>
-          <a:p>
-            <a:r>
-              <a:rPr lang="zh-CN" altLang="en-US" dirty="0" smtClean="0"/>
-              <a:t>第二个是根据</a:t>
-            </a:r>
-            <a:r>
-              <a:rPr lang="en-US" altLang="zh-CN" dirty="0" smtClean="0"/>
-              <a:t>hierarchy planner(</a:t>
-            </a:r>
-            <a:r>
-              <a:rPr lang="zh-CN" altLang="en-US" dirty="0" smtClean="0"/>
-              <a:t>论文见备注</a:t>
-            </a:r>
-            <a:r>
-              <a:rPr lang="en-US" altLang="zh-CN" dirty="0" smtClean="0"/>
-              <a:t>)</a:t>
-            </a:r>
-            <a:r>
-              <a:rPr lang="zh-CN" altLang="en-US" dirty="0" smtClean="0"/>
-              <a:t>的思想</a:t>
-            </a:r>
-            <a:r>
-              <a:rPr lang="en-US" altLang="zh-CN" dirty="0" smtClean="0"/>
-              <a:t>, </a:t>
-            </a:r>
-            <a:r>
-              <a:rPr lang="zh-CN" altLang="en-US" dirty="0" smtClean="0"/>
-              <a:t>对两个求策略梯度</a:t>
-            </a:r>
-            <a:r>
-              <a:rPr lang="en-US" altLang="zh-CN" dirty="0" smtClean="0"/>
-              <a:t>,</a:t>
-            </a:r>
-            <a:r>
-              <a:rPr lang="zh-CN" altLang="en-US" dirty="0" smtClean="0"/>
-              <a:t>同时改变两个网络</a:t>
-            </a:r>
-            <a:r>
-              <a:rPr lang="en-US" altLang="zh-CN" dirty="0" smtClean="0"/>
-              <a:t>. </a:t>
-            </a:r>
-            <a:r>
-              <a:rPr lang="zh-CN" altLang="en-US" dirty="0" smtClean="0"/>
-              <a:t>策略梯度就是如果</a:t>
-            </a:r>
-            <a:r>
-              <a:rPr lang="en-US" altLang="zh-CN" dirty="0"/>
-              <a:t>reward</a:t>
-            </a:r>
-            <a:r>
-              <a:rPr lang="zh-CN" altLang="en-US" dirty="0"/>
-              <a:t>为正，那就最大化这个好的动作</a:t>
-            </a:r>
-            <a:r>
-              <a:rPr lang="zh-CN" altLang="en-US" dirty="0" smtClean="0"/>
-              <a:t>的概率。 收益求导得到动作概率应该变化的方向也就叫做梯度</a:t>
-            </a:r>
-            <a:r>
-              <a:rPr lang="en-US" altLang="zh-CN" dirty="0" smtClean="0"/>
-              <a:t>.</a:t>
-            </a:r>
-            <a:r>
-              <a:rPr lang="zh-CN" altLang="en-US" dirty="0"/>
-              <a:t/>
-            </a:r>
-            <a:br>
-              <a:rPr lang="zh-CN" altLang="en-US" dirty="0"/>
-            </a:br>
-            <a:endParaRPr lang="en-US" altLang="zh-CN" dirty="0" smtClean="0"/>
-          </a:p>
-          <a:p>
-            <a:pPr marL="0" indent="0">
-              <a:buNone/>
-            </a:pPr>
-            <a:endParaRPr lang="en-US" altLang="zh-CN" dirty="0" smtClean="0"/>
-          </a:p>
-          <a:p>
-            <a:pPr lvl="0"/>
-            <a:endParaRPr lang="zh-CN" altLang="en-US" dirty="0"/>
-          </a:p>
-        </p:txBody>
-      </p:sp>
-    </p:spTree>
-    <p:extLst>
-      <p:ext uri="{BB962C8B-B14F-4D97-AF65-F5344CB8AC3E}">
-        <p14:creationId xmlns:p14="http://schemas.microsoft.com/office/powerpoint/2010/main" val="2758414168"/>
-      </p:ext>
-    </p:extLst>
-  </p:cSld>
-  <p:clrMapOvr>
-    <a:masterClrMapping/>
-  </p:clrMapOvr>
-</p:sld>
-</file>
-
-<file path=ppt/slides/slide4.xml><?xml version="1.0" encoding="utf-8"?>
-<p:sld xmlns:a="http://schemas.openxmlformats.org/drawingml/2006/main" xmlns:r="http://schemas.openxmlformats.org/officeDocument/2006/relationships" xmlns:p="http://schemas.openxmlformats.org/presentationml/2006/main">
-  <p:cSld>
-    <p:spTree>
-      <p:nvGrpSpPr>
-        <p:cNvPr id="1" name=""/>
-        <p:cNvGrpSpPr/>
-        <p:nvPr/>
-      </p:nvGrpSpPr>
-      <p:grpSpPr>
-        <a:xfrm>
-          <a:off x="0" y="0"/>
-          <a:ext cx="0" cy="0"/>
-          <a:chOff x="0" y="0"/>
-          <a:chExt cx="0" cy="0"/>
-        </a:xfrm>
-      </p:grpSpPr>
-      <p:sp>
-        <p:nvSpPr>
-          <p:cNvPr id="2" name="标题 1"/>
-          <p:cNvSpPr>
-            <a:spLocks noGrp="1"/>
-          </p:cNvSpPr>
-          <p:nvPr>
-            <p:ph type="title"/>
-          </p:nvPr>
-        </p:nvSpPr>
         <p:spPr/>
         <p:txBody>
           <a:bodyPr/>
@@ -16851,289 +16594,7 @@
           <a:p>
             <a:r>
               <a:rPr lang="en-US" altLang="zh-CN" dirty="0" smtClean="0"/>
-              <a:t>Idea</a:t>
-            </a:r>
-            <a:r>
-              <a:rPr lang="zh-CN" altLang="en-US" dirty="0" smtClean="0"/>
-              <a:t>的简短陈述</a:t>
-            </a:r>
-            <a:endParaRPr lang="zh-CN" altLang="en-US" dirty="0"/>
-          </a:p>
-        </p:txBody>
-      </p:sp>
-      <p:sp>
-        <p:nvSpPr>
-          <p:cNvPr id="4" name="内容占位符 3"/>
-          <p:cNvSpPr>
-            <a:spLocks noGrp="1"/>
-          </p:cNvSpPr>
-          <p:nvPr>
-            <p:ph idx="1"/>
-          </p:nvPr>
-        </p:nvSpPr>
-        <p:spPr/>
-        <p:txBody>
-          <a:bodyPr/>
-          <a:lstStyle/>
-          <a:p>
-            <a:r>
-              <a:rPr lang="zh-CN" altLang="en-US" dirty="0" smtClean="0"/>
-              <a:t>输入 </a:t>
-            </a:r>
-            <a:r>
-              <a:rPr lang="en-US" altLang="zh-CN" dirty="0" smtClean="0"/>
-              <a:t>job type, </a:t>
-            </a:r>
-            <a:r>
-              <a:rPr lang="zh-CN" altLang="en-US" dirty="0" smtClean="0"/>
-              <a:t>已经运行的时间</a:t>
-            </a:r>
-            <a:r>
-              <a:rPr lang="en-US" altLang="zh-CN" dirty="0" smtClean="0"/>
-              <a:t>, </a:t>
-            </a:r>
-            <a:r>
-              <a:rPr lang="zh-CN" altLang="en-US" dirty="0" smtClean="0"/>
-              <a:t>剩余</a:t>
-            </a:r>
-            <a:r>
-              <a:rPr lang="en-US" altLang="zh-CN" dirty="0" smtClean="0"/>
-              <a:t>epoch, </a:t>
-            </a:r>
-            <a:r>
-              <a:rPr lang="zh-CN" altLang="en-US" dirty="0" smtClean="0"/>
-              <a:t>主导资源</a:t>
-            </a:r>
-            <a:r>
-              <a:rPr lang="en-US" altLang="zh-CN" dirty="0" smtClean="0"/>
-              <a:t>,job</a:t>
-            </a:r>
-            <a:r>
-              <a:rPr lang="zh-CN" altLang="en-US" dirty="0" smtClean="0"/>
-              <a:t>目前的</a:t>
-            </a:r>
-            <a:r>
-              <a:rPr lang="en-US" altLang="zh-CN" dirty="0" smtClean="0"/>
-              <a:t>worker</a:t>
-            </a:r>
-            <a:r>
-              <a:rPr lang="zh-CN" altLang="en-US" dirty="0" smtClean="0"/>
-              <a:t>和</a:t>
-            </a:r>
-            <a:r>
-              <a:rPr lang="en-US" altLang="zh-CN" dirty="0" smtClean="0"/>
-              <a:t>PS</a:t>
-            </a:r>
-          </a:p>
-          <a:p>
-            <a:r>
-              <a:rPr lang="zh-CN" altLang="en-US" dirty="0"/>
-              <a:t>第</a:t>
-            </a:r>
-            <a:r>
-              <a:rPr lang="zh-CN" altLang="en-US" dirty="0" smtClean="0"/>
-              <a:t>一级分配资源</a:t>
-            </a:r>
-            <a:r>
-              <a:rPr lang="en-US" altLang="zh-CN" dirty="0" smtClean="0"/>
-              <a:t>, </a:t>
-            </a:r>
-          </a:p>
-          <a:p>
-            <a:r>
-              <a:rPr lang="zh-CN" altLang="en-US" dirty="0"/>
-              <a:t>第二</a:t>
-            </a:r>
-            <a:r>
-              <a:rPr lang="zh-CN" altLang="en-US" dirty="0" smtClean="0"/>
-              <a:t>级 额外</a:t>
-            </a:r>
-            <a:r>
-              <a:rPr lang="en-US" altLang="zh-CN" dirty="0" smtClean="0"/>
-              <a:t>input</a:t>
-            </a:r>
-            <a:r>
-              <a:rPr lang="zh-CN" altLang="en-US" dirty="0" smtClean="0"/>
-              <a:t>服务器可用资源</a:t>
-            </a:r>
-            <a:r>
-              <a:rPr lang="en-US" altLang="zh-CN" dirty="0" smtClean="0"/>
-              <a:t>,</a:t>
-            </a:r>
-            <a:r>
-              <a:rPr lang="zh-CN" altLang="en-US" dirty="0" smtClean="0"/>
-              <a:t>当前的</a:t>
-            </a:r>
-            <a:r>
-              <a:rPr lang="en-US" altLang="zh-CN" dirty="0" smtClean="0"/>
-              <a:t>placement.</a:t>
-            </a:r>
-          </a:p>
-          <a:p>
-            <a:r>
-              <a:rPr lang="zh-CN" altLang="en-US" dirty="0" smtClean="0"/>
-              <a:t>最终输出分配的资源和</a:t>
-            </a:r>
-            <a:r>
-              <a:rPr lang="en-US" altLang="zh-CN" dirty="0" smtClean="0"/>
-              <a:t>placement.</a:t>
-            </a:r>
-          </a:p>
-          <a:p>
-            <a:r>
-              <a:rPr lang="en-US" altLang="zh-CN" dirty="0" smtClean="0"/>
-              <a:t>Reward: </a:t>
-            </a:r>
-            <a:r>
-              <a:rPr lang="zh-CN" altLang="en-US" dirty="0"/>
-              <a:t> </a:t>
-            </a:r>
-            <a:r>
-              <a:rPr lang="zh-CN" altLang="en-US" dirty="0" smtClean="0"/>
-              <a:t>计算</a:t>
-            </a:r>
-            <a:r>
-              <a:rPr lang="en-US" altLang="zh-CN" dirty="0" smtClean="0"/>
-              <a:t>reward</a:t>
-            </a:r>
-            <a:r>
-              <a:rPr lang="zh-CN" altLang="en-US" dirty="0" smtClean="0"/>
-              <a:t>给第一级和第二级用</a:t>
-            </a:r>
-            <a:r>
-              <a:rPr lang="en-US" altLang="zh-CN" dirty="0" smtClean="0"/>
-              <a:t>.</a:t>
-            </a:r>
-          </a:p>
-          <a:p>
-            <a:r>
-              <a:rPr lang="zh-CN" altLang="en-US" dirty="0" smtClean="0"/>
-              <a:t>图见下页</a:t>
-            </a:r>
-            <a:r>
-              <a:rPr lang="en-US" altLang="zh-CN" dirty="0" smtClean="0"/>
-              <a:t>. </a:t>
-            </a:r>
-            <a:r>
-              <a:rPr lang="zh-CN" altLang="en-US" dirty="0" smtClean="0"/>
-              <a:t>输入有的来自集群</a:t>
-            </a:r>
-            <a:r>
-              <a:rPr lang="en-US" altLang="zh-CN" dirty="0" smtClean="0"/>
-              <a:t>API</a:t>
-            </a:r>
-            <a:r>
-              <a:rPr lang="zh-CN" altLang="en-US" dirty="0" smtClean="0"/>
-              <a:t>有的来自</a:t>
-            </a:r>
-            <a:r>
-              <a:rPr lang="en-US" altLang="zh-CN" dirty="0" smtClean="0"/>
-              <a:t>job owner. </a:t>
-            </a:r>
-            <a:r>
-              <a:rPr lang="zh-CN" altLang="en-US" dirty="0" smtClean="0"/>
-              <a:t>来自</a:t>
-            </a:r>
-            <a:r>
-              <a:rPr lang="en-US" altLang="zh-CN" dirty="0" smtClean="0"/>
-              <a:t>job owner</a:t>
-            </a:r>
-            <a:r>
-              <a:rPr lang="zh-CN" altLang="en-US" dirty="0" smtClean="0"/>
-              <a:t>的在实验中可以固定</a:t>
-            </a:r>
-            <a:r>
-              <a:rPr lang="en-US" altLang="zh-CN" dirty="0" smtClean="0"/>
-              <a:t>.</a:t>
-            </a:r>
-          </a:p>
-          <a:p>
-            <a:r>
-              <a:rPr lang="zh-CN" altLang="en-US" dirty="0"/>
-              <a:t>第一层 </a:t>
-            </a:r>
-            <a:r>
-              <a:rPr lang="en-US" altLang="zh-CN" dirty="0"/>
-              <a:t>value NN </a:t>
-            </a:r>
-            <a:r>
-              <a:rPr lang="zh-CN" altLang="en-US" dirty="0"/>
-              <a:t>预测</a:t>
-            </a:r>
-            <a:r>
-              <a:rPr lang="en-US" altLang="zh-CN" dirty="0"/>
-              <a:t>,  </a:t>
-            </a:r>
-            <a:r>
-              <a:rPr lang="zh-CN" altLang="en-US" dirty="0"/>
-              <a:t>先分别训练两个网络</a:t>
-            </a:r>
-            <a:r>
-              <a:rPr lang="en-US" altLang="zh-CN" dirty="0"/>
-              <a:t>. </a:t>
-            </a:r>
-            <a:r>
-              <a:rPr lang="zh-CN" altLang="en-US" dirty="0"/>
-              <a:t>有助于收敛</a:t>
-            </a:r>
-            <a:r>
-              <a:rPr lang="en-US" altLang="zh-CN" dirty="0"/>
-              <a:t>.</a:t>
-            </a:r>
-          </a:p>
-          <a:p>
-            <a:endParaRPr lang="en-US" altLang="zh-CN" dirty="0" smtClean="0"/>
-          </a:p>
-        </p:txBody>
-      </p:sp>
-    </p:spTree>
-    <p:extLst>
-      <p:ext uri="{BB962C8B-B14F-4D97-AF65-F5344CB8AC3E}">
-        <p14:creationId xmlns:p14="http://schemas.microsoft.com/office/powerpoint/2010/main" val="2709092621"/>
-      </p:ext>
-    </p:extLst>
-  </p:cSld>
-  <p:clrMapOvr>
-    <a:masterClrMapping/>
-  </p:clrMapOvr>
-</p:sld>
-</file>
-
-<file path=ppt/slides/slide5.xml><?xml version="1.0" encoding="utf-8"?>
-<p:sld xmlns:a="http://schemas.openxmlformats.org/drawingml/2006/main" xmlns:r="http://schemas.openxmlformats.org/officeDocument/2006/relationships" xmlns:p="http://schemas.openxmlformats.org/presentationml/2006/main">
-  <p:cSld>
-    <p:spTree>
-      <p:nvGrpSpPr>
-        <p:cNvPr id="1" name=""/>
-        <p:cNvGrpSpPr/>
-        <p:nvPr/>
-      </p:nvGrpSpPr>
-      <p:grpSpPr>
-        <a:xfrm>
-          <a:off x="0" y="0"/>
-          <a:ext cx="0" cy="0"/>
-          <a:chOff x="0" y="0"/>
-          <a:chExt cx="0" cy="0"/>
-        </a:xfrm>
-      </p:grpSpPr>
-      <p:sp>
-        <p:nvSpPr>
-          <p:cNvPr id="2" name="标题 1"/>
-          <p:cNvSpPr>
-            <a:spLocks noGrp="1"/>
-          </p:cNvSpPr>
-          <p:nvPr>
-            <p:ph type="title"/>
-          </p:nvPr>
-        </p:nvSpPr>
-        <p:spPr/>
-        <p:txBody>
-          <a:bodyPr/>
-          <a:lstStyle/>
-          <a:p>
-            <a:r>
-              <a:rPr lang="en-US" altLang="zh-CN" dirty="0" smtClean="0"/>
-              <a:t>reward</a:t>
+              <a:t>Resource allocation</a:t>
             </a:r>
             <a:endParaRPr lang="zh-CN" altLang="en-US" dirty="0"/>
           </a:p>
@@ -17148,14 +16609,14 @@
           <p:nvPr>
             <p:extLst>
               <p:ext uri="{D42A27DB-BD31-4B8C-83A1-F6EECF244321}">
-                <p14:modId xmlns:p14="http://schemas.microsoft.com/office/powerpoint/2010/main" val="3536488281"/>
+                <p14:modId xmlns:p14="http://schemas.microsoft.com/office/powerpoint/2010/main" val="3245545239"/>
               </p:ext>
             </p:extLst>
           </p:nvPr>
         </p:nvGraphicFramePr>
         <p:xfrm>
           <a:off x="838200" y="1752598"/>
-          <a:ext cx="9398001" cy="4003200"/>
+          <a:ext cx="9398001" cy="1900080"/>
         </p:xfrm>
         <a:graphic>
           <a:graphicData uri="http://schemas.openxmlformats.org/drawingml/2006/table">
@@ -17203,8 +16664,8 @@
                     <a:lstStyle/>
                     <a:p>
                       <a:r>
-                        <a:rPr lang="zh-CN" altLang="en-US" dirty="0" smtClean="0"/>
-                        <a:t>怎么获得</a:t>
+                        <a:rPr lang="en-US" altLang="zh-CN" dirty="0" smtClean="0"/>
+                        <a:t>Key idea</a:t>
                       </a:r>
                       <a:endParaRPr lang="zh-CN" altLang="en-US" dirty="0"/>
                     </a:p>
@@ -17238,10 +16699,26 @@
                     <a:lstStyle/>
                     <a:p>
                       <a:r>
-                        <a:rPr lang="en-US" altLang="zh-CN" dirty="0" smtClean="0"/>
-                        <a:t>DL2</a:t>
+                        <a:rPr lang="en-US" altLang="zh-CN" sz="1800" b="1" i="0" kern="1200" dirty="0" err="1" smtClean="0">
+                          <a:solidFill>
+                            <a:schemeClr val="dk1"/>
+                          </a:solidFill>
+                          <a:effectLst/>
+                          <a:latin typeface="+mn-lt"/>
+                          <a:ea typeface="+mn-ea"/>
+                          <a:cs typeface="+mn-cs"/>
+                        </a:rPr>
+                        <a:t>Gandiva</a:t>
                       </a:r>
-                      <a:endParaRPr lang="zh-CN" altLang="en-US" dirty="0"/>
+                      <a:endParaRPr lang="en-US" altLang="zh-CN" sz="1800" b="1" i="0" kern="1200" dirty="0">
+                        <a:solidFill>
+                          <a:schemeClr val="dk1"/>
+                        </a:solidFill>
+                        <a:effectLst/>
+                        <a:latin typeface="+mn-lt"/>
+                        <a:ea typeface="+mn-ea"/>
+                        <a:cs typeface="+mn-cs"/>
+                      </a:endParaRPr>
                     </a:p>
                   </a:txBody>
                   <a:tcPr/>
@@ -17252,88 +16729,28 @@
                     <a:lstStyle/>
                     <a:p>
                       <a:r>
-                        <a:rPr lang="zh-CN" altLang="en-US" sz="1800" b="0" i="0" kern="1200" dirty="0" smtClean="0">
-                          <a:solidFill>
-                            <a:schemeClr val="dk1"/>
-                          </a:solidFill>
-                          <a:effectLst/>
-                          <a:latin typeface="+mn-lt"/>
-                          <a:ea typeface="+mn-ea"/>
-                          <a:cs typeface="+mn-cs"/>
-                        </a:rPr>
-                        <a:t>时隙 </a:t>
+                        <a:rPr lang="zh-CN" altLang="en-US" dirty="0" smtClean="0"/>
+                        <a:t>利用</a:t>
                       </a:r>
                       <a:r>
-                        <a:rPr lang="en-US" altLang="zh-CN" sz="1800" b="0" i="0" kern="1200" dirty="0" smtClean="0">
-                          <a:solidFill>
-                            <a:schemeClr val="dk1"/>
-                          </a:solidFill>
-                          <a:effectLst/>
-                          <a:latin typeface="+mn-lt"/>
-                          <a:ea typeface="+mn-ea"/>
-                          <a:cs typeface="+mn-cs"/>
-                        </a:rPr>
-                        <a:t>t </a:t>
+                        <a:rPr lang="en-US" altLang="zh-CN" dirty="0" smtClean="0"/>
+                        <a:t>job</a:t>
                       </a:r>
                       <a:r>
-                        <a:rPr lang="zh-CN" altLang="en-US" sz="1800" b="0" i="0" kern="1200" dirty="0" smtClean="0">
-                          <a:solidFill>
-                            <a:schemeClr val="dk1"/>
-                          </a:solidFill>
-                          <a:effectLst/>
-                          <a:latin typeface="+mn-lt"/>
-                          <a:ea typeface="+mn-ea"/>
-                          <a:cs typeface="+mn-cs"/>
-                        </a:rPr>
-                        <a:t>中获取多个</a:t>
+                        <a:rPr lang="zh-CN" altLang="en-US" dirty="0" smtClean="0"/>
+                        <a:t>的特性来分配</a:t>
                       </a:r>
                       <a:r>
-                        <a:rPr lang="en-US" altLang="zh-CN" sz="1800" b="0" i="0" kern="1200" dirty="0" smtClean="0">
-                          <a:solidFill>
-                            <a:schemeClr val="dk1"/>
-                          </a:solidFill>
-                          <a:effectLst/>
-                          <a:latin typeface="+mn-lt"/>
-                          <a:ea typeface="+mn-ea"/>
-                          <a:cs typeface="+mn-cs"/>
-                        </a:rPr>
-                        <a:t>sample,</a:t>
+                        <a:rPr lang="en-US" altLang="zh-CN" dirty="0" smtClean="0"/>
+                        <a:t>GPU</a:t>
                       </a:r>
                       <a:r>
-                        <a:rPr lang="zh-CN" altLang="en-US" sz="1800" b="0" i="0" kern="1200" dirty="0" smtClean="0">
-                          <a:solidFill>
-                            <a:schemeClr val="dk1"/>
-                          </a:solidFill>
-                          <a:effectLst/>
-                          <a:latin typeface="+mn-lt"/>
-                          <a:ea typeface="+mn-ea"/>
-                          <a:cs typeface="+mn-cs"/>
-                        </a:rPr>
-                        <a:t>对累计奖励执行 </a:t>
+                        <a:rPr lang="zh-CN" altLang="en-US" dirty="0" smtClean="0"/>
+                        <a:t>时间</a:t>
                       </a:r>
                       <a:r>
-                        <a:rPr lang="en-US" altLang="zh-CN" sz="1800" b="0" i="0" kern="1200" dirty="0" smtClean="0">
-                          <a:solidFill>
-                            <a:schemeClr val="dk1"/>
-                          </a:solidFill>
-                          <a:effectLst/>
-                          <a:latin typeface="+mn-lt"/>
-                          <a:ea typeface="+mn-ea"/>
-                          <a:cs typeface="+mn-cs"/>
-                        </a:rPr>
-                        <a:t>SGD </a:t>
-                      </a:r>
-                      <a:r>
-                        <a:rPr lang="zh-CN" altLang="en-US" sz="1800" b="0" i="0" kern="1200" dirty="0" smtClean="0">
-                          <a:solidFill>
-                            <a:schemeClr val="dk1"/>
-                          </a:solidFill>
-                          <a:effectLst/>
-                          <a:latin typeface="+mn-lt"/>
-                          <a:ea typeface="+mn-ea"/>
-                          <a:cs typeface="+mn-cs"/>
-                        </a:rPr>
-                        <a:t>来更新策略网络的参数 </a:t>
+                        <a:rPr lang="en-US" altLang="zh-CN" smtClean="0"/>
+                        <a:t>,</a:t>
                       </a:r>
                       <a:endParaRPr lang="zh-CN" altLang="en-US" dirty="0"/>
                     </a:p>
@@ -17362,9 +16779,160 @@
                     <a:bodyPr/>
                     <a:lstStyle/>
                     <a:p>
+                      <a:endParaRPr lang="zh-CN" altLang="en-US" dirty="0"/>
+                    </a:p>
+                  </a:txBody>
+                  <a:tcPr/>
+                </a:tc>
+                <a:tc>
+                  <a:txBody>
+                    <a:bodyPr/>
+                    <a:lstStyle/>
+                    <a:p>
+                      <a:endParaRPr lang="zh-CN" altLang="en-US" dirty="0"/>
+                    </a:p>
+                  </a:txBody>
+                  <a:tcPr/>
+                </a:tc>
+                <a:tc>
+                  <a:txBody>
+                    <a:bodyPr/>
+                    <a:lstStyle/>
+                    <a:p>
+                      <a:endParaRPr lang="zh-CN" altLang="en-US" dirty="0"/>
+                    </a:p>
+                  </a:txBody>
+                  <a:tcPr/>
+                </a:tc>
+                <a:extLst>
+                  <a:ext uri="{0D108BD9-81ED-4DB2-BD59-A6C34878D82A}">
+                    <a16:rowId xmlns:a16="http://schemas.microsoft.com/office/drawing/2014/main" val="487215583"/>
+                  </a:ext>
+                </a:extLst>
+              </a:tr>
+            </a:tbl>
+          </a:graphicData>
+        </a:graphic>
+      </p:graphicFrame>
+    </p:spTree>
+    <p:extLst>
+      <p:ext uri="{BB962C8B-B14F-4D97-AF65-F5344CB8AC3E}">
+        <p14:creationId xmlns:p14="http://schemas.microsoft.com/office/powerpoint/2010/main" val="3115143314"/>
+      </p:ext>
+    </p:extLst>
+  </p:cSld>
+  <p:clrMapOvr>
+    <a:masterClrMapping/>
+  </p:clrMapOvr>
+</p:sld>
+</file>
+
+<file path=ppt/slides/slide4.xml><?xml version="1.0" encoding="utf-8"?>
+<p:sld xmlns:a="http://schemas.openxmlformats.org/drawingml/2006/main" xmlns:r="http://schemas.openxmlformats.org/officeDocument/2006/relationships" xmlns:p="http://schemas.openxmlformats.org/presentationml/2006/main">
+  <p:cSld>
+    <p:spTree>
+      <p:nvGrpSpPr>
+        <p:cNvPr id="1" name=""/>
+        <p:cNvGrpSpPr/>
+        <p:nvPr/>
+      </p:nvGrpSpPr>
+      <p:grpSpPr>
+        <a:xfrm>
+          <a:off x="0" y="0"/>
+          <a:ext cx="0" cy="0"/>
+          <a:chOff x="0" y="0"/>
+          <a:chExt cx="0" cy="0"/>
+        </a:xfrm>
+      </p:grpSpPr>
+      <p:sp>
+        <p:nvSpPr>
+          <p:cNvPr id="2" name="标题 1"/>
+          <p:cNvSpPr>
+            <a:spLocks noGrp="1"/>
+          </p:cNvSpPr>
+          <p:nvPr>
+            <p:ph type="title"/>
+          </p:nvPr>
+        </p:nvSpPr>
+        <p:spPr/>
+        <p:txBody>
+          <a:bodyPr/>
+          <a:lstStyle/>
+          <a:p>
+            <a:r>
+              <a:rPr lang="en-US" altLang="zh-CN" dirty="0" smtClean="0"/>
+              <a:t>Device placement</a:t>
+            </a:r>
+            <a:endParaRPr lang="zh-CN" altLang="en-US" dirty="0"/>
+          </a:p>
+        </p:txBody>
+      </p:sp>
+      <p:graphicFrame>
+        <p:nvGraphicFramePr>
+          <p:cNvPr id="4" name="表格 3"/>
+          <p:cNvGraphicFramePr>
+            <a:graphicFrameLocks noGrp="1"/>
+          </p:cNvGraphicFramePr>
+          <p:nvPr>
+            <p:extLst>
+              <p:ext uri="{D42A27DB-BD31-4B8C-83A1-F6EECF244321}">
+                <p14:modId xmlns:p14="http://schemas.microsoft.com/office/powerpoint/2010/main" val="4036305913"/>
+              </p:ext>
+            </p:extLst>
+          </p:nvPr>
+        </p:nvGraphicFramePr>
+        <p:xfrm>
+          <a:off x="838200" y="1752598"/>
+          <a:ext cx="9398001" cy="2530080"/>
+        </p:xfrm>
+        <a:graphic>
+          <a:graphicData uri="http://schemas.openxmlformats.org/drawingml/2006/table">
+            <a:tbl>
+              <a:tblPr firstRow="1" bandRow="1">
+                <a:tableStyleId>{5C22544A-7EE6-4342-B048-85BDC9FD1C3A}</a:tableStyleId>
+              </a:tblPr>
+              <a:tblGrid>
+                <a:gridCol w="3132667">
+                  <a:extLst>
+                    <a:ext uri="{9D8B030D-6E8A-4147-A177-3AD203B41FA5}">
+                      <a16:colId xmlns:a16="http://schemas.microsoft.com/office/drawing/2014/main" val="2104862403"/>
+                    </a:ext>
+                  </a:extLst>
+                </a:gridCol>
+                <a:gridCol w="3132667">
+                  <a:extLst>
+                    <a:ext uri="{9D8B030D-6E8A-4147-A177-3AD203B41FA5}">
+                      <a16:colId xmlns:a16="http://schemas.microsoft.com/office/drawing/2014/main" val="3631488225"/>
+                    </a:ext>
+                  </a:extLst>
+                </a:gridCol>
+                <a:gridCol w="3132667">
+                  <a:extLst>
+                    <a:ext uri="{9D8B030D-6E8A-4147-A177-3AD203B41FA5}">
+                      <a16:colId xmlns:a16="http://schemas.microsoft.com/office/drawing/2014/main" val="1593399558"/>
+                    </a:ext>
+                  </a:extLst>
+                </a:gridCol>
+              </a:tblGrid>
+              <a:tr h="630000">
+                <a:tc>
+                  <a:txBody>
+                    <a:bodyPr/>
+                    <a:lstStyle/>
+                    <a:p>
+                      <a:endParaRPr lang="zh-CN" altLang="en-US" dirty="0"/>
+                    </a:p>
+                  </a:txBody>
+                  <a:tcPr/>
+                </a:tc>
+                <a:tc>
+                  <a:txBody>
+                    <a:bodyPr/>
+                    <a:lstStyle/>
+                    <a:p>
                       <a:r>
                         <a:rPr lang="en-US" altLang="zh-CN" dirty="0" smtClean="0"/>
-                        <a:t>Harmony</a:t>
+                        <a:t>Key idea</a:t>
                       </a:r>
                       <a:endParaRPr lang="zh-CN" altLang="en-US" dirty="0"/>
                     </a:p>
@@ -17377,53 +16945,273 @@
                     <a:lstStyle/>
                     <a:p>
                       <a:r>
-                        <a:rPr lang="en-US" altLang="zh-CN" dirty="0" smtClean="0"/>
-                        <a:t>Value NN ,</a:t>
+                        <a:rPr lang="zh-CN" altLang="en-US" dirty="0" smtClean="0"/>
+                        <a:t>是否可以用在我们的设计</a:t>
+                      </a:r>
+                      <a:endParaRPr lang="zh-CN" altLang="en-US" dirty="0"/>
+                    </a:p>
+                  </a:txBody>
+                  <a:tcPr/>
+                </a:tc>
+                <a:extLst>
+                  <a:ext uri="{0D108BD9-81ED-4DB2-BD59-A6C34878D82A}">
+                    <a16:rowId xmlns:a16="http://schemas.microsoft.com/office/drawing/2014/main" val="3322635084"/>
+                  </a:ext>
+                </a:extLst>
+              </a:tr>
+              <a:tr h="630000">
+                <a:tc>
+                  <a:txBody>
+                    <a:bodyPr/>
+                    <a:lstStyle/>
+                    <a:p>
+                      <a:r>
+                        <a:rPr lang="en-US" altLang="zh-CN" sz="1800" b="1" i="0" kern="1200" dirty="0" smtClean="0">
+                          <a:solidFill>
+                            <a:schemeClr val="dk1"/>
+                          </a:solidFill>
+                          <a:effectLst/>
+                          <a:latin typeface="+mn-lt"/>
+                          <a:ea typeface="+mn-ea"/>
+                          <a:cs typeface="+mn-cs"/>
+                        </a:rPr>
+                        <a:t>Spotlight</a:t>
+                      </a:r>
+                      <a:endParaRPr lang="en-US" altLang="zh-CN" sz="1800" b="1" i="0" kern="1200" dirty="0">
+                        <a:solidFill>
+                          <a:schemeClr val="dk1"/>
+                        </a:solidFill>
+                        <a:effectLst/>
+                        <a:latin typeface="+mn-lt"/>
+                        <a:ea typeface="+mn-ea"/>
+                        <a:cs typeface="+mn-cs"/>
+                      </a:endParaRPr>
+                    </a:p>
+                  </a:txBody>
+                  <a:tcPr/>
+                </a:tc>
+                <a:tc>
+                  <a:txBody>
+                    <a:bodyPr/>
+                    <a:lstStyle/>
+                    <a:p>
+                      <a:r>
+                        <a:rPr lang="zh-CN" altLang="en-US" sz="1800" b="0" i="0" kern="1200" dirty="0" smtClean="0">
+                          <a:solidFill>
+                            <a:schemeClr val="dk1"/>
+                          </a:solidFill>
+                          <a:effectLst/>
+                          <a:latin typeface="+mn-lt"/>
+                          <a:ea typeface="+mn-ea"/>
+                          <a:cs typeface="+mn-cs"/>
+                        </a:rPr>
+                        <a:t>一种基于</a:t>
                       </a:r>
                       <a:r>
-                        <a:rPr lang="zh-CN" altLang="en-US" dirty="0" smtClean="0"/>
-                        <a:t>输入</a:t>
+                        <a:rPr lang="en-US" altLang="zh-CN" sz="1800" b="0" i="0" kern="1200" dirty="0" smtClean="0">
+                          <a:solidFill>
+                            <a:schemeClr val="dk1"/>
+                          </a:solidFill>
+                          <a:effectLst/>
+                          <a:latin typeface="+mn-lt"/>
+                          <a:ea typeface="+mn-ea"/>
+                          <a:cs typeface="+mn-cs"/>
+                        </a:rPr>
+                        <a:t>PPO</a:t>
                       </a:r>
                       <a:r>
-                        <a:rPr lang="en-US" altLang="zh-CN" dirty="0" smtClean="0"/>
+                        <a:rPr lang="zh-CN" altLang="en-US" sz="1800" b="0" i="0" kern="1200" dirty="0" smtClean="0">
+                          <a:solidFill>
+                            <a:schemeClr val="dk1"/>
+                          </a:solidFill>
+                          <a:effectLst/>
+                          <a:latin typeface="+mn-lt"/>
+                          <a:ea typeface="+mn-ea"/>
+                          <a:cs typeface="+mn-cs"/>
+                        </a:rPr>
+                        <a:t>的</a:t>
+                      </a:r>
+                      <a:r>
+                        <a:rPr lang="en-US" altLang="zh-CN" sz="1800" b="0" i="0" kern="1200" dirty="0" smtClean="0">
+                          <a:solidFill>
+                            <a:schemeClr val="dk1"/>
+                          </a:solidFill>
+                          <a:effectLst/>
+                          <a:latin typeface="+mn-lt"/>
+                          <a:ea typeface="+mn-ea"/>
+                          <a:cs typeface="+mn-cs"/>
+                        </a:rPr>
+                        <a:t>RL</a:t>
+                      </a:r>
+                      <a:r>
+                        <a:rPr lang="zh-CN" altLang="en-US" sz="1800" b="0" i="0" kern="1200" dirty="0" smtClean="0">
+                          <a:solidFill>
+                            <a:schemeClr val="dk1"/>
+                          </a:solidFill>
+                          <a:effectLst/>
+                          <a:latin typeface="+mn-lt"/>
+                          <a:ea typeface="+mn-ea"/>
+                          <a:cs typeface="+mn-cs"/>
+                        </a:rPr>
+                        <a:t>算法</a:t>
+                      </a:r>
+                      <a:r>
+                        <a:rPr lang="en-US" altLang="zh-CN" sz="1800" b="0" i="0" kern="1200" dirty="0" smtClean="0">
+                          <a:solidFill>
+                            <a:schemeClr val="dk1"/>
+                          </a:solidFill>
+                          <a:effectLst/>
+                          <a:latin typeface="+mn-lt"/>
+                          <a:ea typeface="+mn-ea"/>
+                          <a:cs typeface="+mn-cs"/>
+                        </a:rPr>
+                        <a:t>,</a:t>
+                      </a:r>
+                      <a:r>
+                        <a:rPr lang="zh-CN" altLang="en-US" sz="1800" b="0" i="0" kern="1200" dirty="0" smtClean="0">
+                          <a:solidFill>
+                            <a:schemeClr val="dk1"/>
+                          </a:solidFill>
+                          <a:effectLst/>
+                          <a:latin typeface="+mn-lt"/>
+                          <a:ea typeface="+mn-ea"/>
+                          <a:cs typeface="+mn-cs"/>
+                        </a:rPr>
+                        <a:t>建模 </a:t>
+                      </a:r>
+                      <a:r>
+                        <a:rPr lang="en-US" altLang="zh-CN" sz="1800" b="0" i="0" kern="1200" dirty="0" smtClean="0">
+                          <a:solidFill>
+                            <a:schemeClr val="dk1"/>
+                          </a:solidFill>
+                          <a:effectLst/>
+                          <a:latin typeface="+mn-lt"/>
+                          <a:ea typeface="+mn-ea"/>
+                          <a:cs typeface="+mn-cs"/>
+                        </a:rPr>
+                        <a:t>MDP</a:t>
+                      </a:r>
+                      <a:endParaRPr lang="zh-CN" altLang="en-US" dirty="0"/>
+                    </a:p>
+                  </a:txBody>
+                  <a:tcPr/>
+                </a:tc>
+                <a:tc>
+                  <a:txBody>
+                    <a:bodyPr/>
+                    <a:lstStyle/>
+                    <a:p>
+                      <a:r>
+                        <a:rPr lang="zh-CN" altLang="en-US" sz="1800" b="0" i="0" kern="1200" dirty="0" smtClean="0">
+                          <a:solidFill>
+                            <a:schemeClr val="dk1"/>
+                          </a:solidFill>
+                          <a:effectLst/>
+                          <a:latin typeface="+mn-lt"/>
+                          <a:ea typeface="+mn-ea"/>
+                          <a:cs typeface="+mn-cs"/>
+                        </a:rPr>
+                        <a:t>不能优化</a:t>
+                      </a:r>
+                      <a:r>
+                        <a:rPr lang="en-US" altLang="zh-CN" sz="1800" b="0" i="0" kern="1200" dirty="0" err="1" smtClean="0">
+                          <a:solidFill>
+                            <a:schemeClr val="dk1"/>
+                          </a:solidFill>
+                          <a:effectLst/>
+                          <a:latin typeface="+mn-lt"/>
+                          <a:ea typeface="+mn-ea"/>
+                          <a:cs typeface="+mn-cs"/>
+                        </a:rPr>
+                        <a:t>colocated</a:t>
+                      </a:r>
+                      <a:r>
+                        <a:rPr lang="en-US" altLang="zh-CN" sz="1800" b="0" i="0" kern="1200" dirty="0" smtClean="0">
+                          <a:solidFill>
+                            <a:schemeClr val="dk1"/>
+                          </a:solidFill>
+                          <a:effectLst/>
+                          <a:latin typeface="+mn-lt"/>
+                          <a:ea typeface="+mn-ea"/>
+                          <a:cs typeface="+mn-cs"/>
+                        </a:rPr>
+                        <a:t> </a:t>
+                      </a:r>
+                      <a:r>
+                        <a:rPr lang="zh-CN" altLang="en-US" sz="1800" b="0" i="0" kern="1200" dirty="0" smtClean="0">
+                          <a:solidFill>
+                            <a:schemeClr val="dk1"/>
+                          </a:solidFill>
+                          <a:effectLst/>
+                          <a:latin typeface="+mn-lt"/>
+                          <a:ea typeface="+mn-ea"/>
+                          <a:cs typeface="+mn-cs"/>
+                        </a:rPr>
+                        <a:t>多个</a:t>
+                      </a:r>
+                      <a:r>
+                        <a:rPr lang="en-US" altLang="zh-CN" sz="1800" b="0" i="0" kern="1200" dirty="0" smtClean="0">
+                          <a:solidFill>
+                            <a:schemeClr val="dk1"/>
+                          </a:solidFill>
+                          <a:effectLst/>
+                          <a:latin typeface="+mn-lt"/>
+                          <a:ea typeface="+mn-ea"/>
+                          <a:cs typeface="+mn-cs"/>
+                        </a:rPr>
                         <a:t>job</a:t>
                       </a:r>
                       <a:r>
-                        <a:rPr lang="zh-CN" altLang="en-US" dirty="0" smtClean="0"/>
-                        <a:t>信息和</a:t>
+                        <a:rPr lang="zh-CN" altLang="en-US" sz="1800" b="0" i="0" kern="1200" dirty="0" smtClean="0">
+                          <a:solidFill>
+                            <a:schemeClr val="dk1"/>
+                          </a:solidFill>
+                          <a:effectLst/>
+                          <a:latin typeface="+mn-lt"/>
+                          <a:ea typeface="+mn-ea"/>
+                          <a:cs typeface="+mn-cs"/>
+                        </a:rPr>
+                        <a:t>的</a:t>
                       </a:r>
                       <a:r>
-                        <a:rPr lang="en-US" altLang="zh-CN" dirty="0" smtClean="0"/>
-                        <a:t>placement,</a:t>
+                        <a:rPr lang="en-US" altLang="zh-CN" sz="1800" b="0" i="0" kern="1200" dirty="0" smtClean="0">
+                          <a:solidFill>
+                            <a:schemeClr val="dk1"/>
+                          </a:solidFill>
+                          <a:effectLst/>
+                          <a:latin typeface="+mn-lt"/>
+                          <a:ea typeface="+mn-ea"/>
+                          <a:cs typeface="+mn-cs"/>
+                        </a:rPr>
+                        <a:t>.</a:t>
                       </a:r>
-                      <a:r>
-                        <a:rPr lang="zh-CN" altLang="en-US" dirty="0" smtClean="0"/>
-                        <a:t>输出预测</a:t>
-                      </a:r>
-                      <a:r>
-                        <a:rPr lang="en-US" altLang="zh-CN" dirty="0" smtClean="0"/>
-                        <a:t>reward</a:t>
-                      </a:r>
-                      <a:r>
-                        <a:rPr lang="en-US" altLang="zh-CN" baseline="0" dirty="0" smtClean="0"/>
-                        <a:t> </a:t>
-                      </a:r>
-                      <a:r>
-                        <a:rPr lang="zh-CN" altLang="en-US" baseline="0" dirty="0" smtClean="0"/>
-                        <a:t>作为</a:t>
-                      </a:r>
-                      <a:r>
-                        <a:rPr lang="en-US" altLang="zh-CN" baseline="0" dirty="0" smtClean="0"/>
-                        <a:t>label</a:t>
-                      </a:r>
-                      <a:r>
-                        <a:rPr lang="zh-CN" altLang="en-US" baseline="0" dirty="0" smtClean="0"/>
-                        <a:t>数据进入</a:t>
-                      </a:r>
-                      <a:r>
-                        <a:rPr lang="en-US" altLang="zh-CN" baseline="0" dirty="0" smtClean="0"/>
-                        <a:t>synthetic trace</a:t>
-                      </a:r>
+                      <a:endParaRPr lang="zh-CN" altLang="en-US" dirty="0"/>
+                    </a:p>
+                  </a:txBody>
+                  <a:tcPr/>
+                </a:tc>
+                <a:extLst>
+                  <a:ext uri="{0D108BD9-81ED-4DB2-BD59-A6C34878D82A}">
+                    <a16:rowId xmlns:a16="http://schemas.microsoft.com/office/drawing/2014/main" val="4110064030"/>
+                  </a:ext>
+                </a:extLst>
+              </a:tr>
+              <a:tr h="630000">
+                <a:tc>
+                  <a:txBody>
+                    <a:bodyPr/>
+                    <a:lstStyle/>
+                    <a:p>
+                      <a:endParaRPr lang="zh-CN" altLang="en-US" dirty="0"/>
+                    </a:p>
+                  </a:txBody>
+                  <a:tcPr/>
+                </a:tc>
+                <a:tc>
+                  <a:txBody>
+                    <a:bodyPr/>
+                    <a:lstStyle/>
+                    <a:p>
                       <a:endParaRPr lang="zh-CN" altLang="en-US" dirty="0"/>
                     </a:p>
                   </a:txBody>
@@ -17451,10 +17239,6 @@
                     <a:bodyPr/>
                     <a:lstStyle/>
                     <a:p>
-                      <a:r>
-                        <a:rPr lang="en-US" altLang="zh-CN" dirty="0" smtClean="0"/>
-                        <a:t>Hierarchy planner</a:t>
-                      </a:r>
                       <a:endParaRPr lang="zh-CN" altLang="en-US" dirty="0"/>
                     </a:p>
                   </a:txBody>
@@ -17465,26 +17249,6 @@
                     <a:bodyPr/>
                     <a:lstStyle/>
                     <a:p>
-                      <a:r>
-                        <a:rPr lang="en-US" altLang="zh-CN" dirty="0" smtClean="0"/>
-                        <a:t> reward</a:t>
-                      </a:r>
-                      <a:r>
-                        <a:rPr lang="zh-CN" altLang="en-US" dirty="0" smtClean="0"/>
-                        <a:t>就是运行速度</a:t>
-                      </a:r>
-                      <a:r>
-                        <a:rPr lang="en-US" altLang="zh-CN" dirty="0" smtClean="0"/>
-                        <a:t>, </a:t>
-                      </a:r>
-                      <a:r>
-                        <a:rPr lang="zh-CN" altLang="en-US" dirty="0" smtClean="0"/>
-                        <a:t>对两层分别求偏导</a:t>
-                      </a:r>
-                      <a:r>
-                        <a:rPr lang="en-US" altLang="zh-CN" dirty="0" smtClean="0"/>
-                        <a:t>,</a:t>
-                      </a:r>
                       <a:endParaRPr lang="zh-CN" altLang="en-US" dirty="0"/>
                     </a:p>
                   </a:txBody>
@@ -17495,30 +17259,6 @@
                     <a:bodyPr/>
                     <a:lstStyle/>
                     <a:p>
-                      <a:r>
-                        <a:rPr lang="zh-CN" altLang="en-US" dirty="0" smtClean="0"/>
-                        <a:t>可以用</a:t>
-                      </a:r>
-                      <a:r>
-                        <a:rPr lang="en-US" altLang="zh-CN" dirty="0" smtClean="0"/>
-                        <a:t>,</a:t>
-                      </a:r>
-                      <a:r>
-                        <a:rPr lang="zh-CN" altLang="en-US" dirty="0" smtClean="0"/>
-                        <a:t>它是自动分组</a:t>
-                      </a:r>
-                      <a:r>
-                        <a:rPr lang="en-US" altLang="zh-CN" dirty="0" smtClean="0"/>
-                        <a:t>,</a:t>
-                      </a:r>
-                      <a:r>
-                        <a:rPr lang="zh-CN" altLang="en-US" dirty="0" smtClean="0"/>
-                        <a:t>我们是在自动分配资源</a:t>
-                      </a:r>
-                      <a:r>
-                        <a:rPr lang="en-US" altLang="zh-CN" dirty="0" smtClean="0"/>
-                        <a:t>.</a:t>
-                      </a:r>
                       <a:endParaRPr lang="zh-CN" altLang="en-US" dirty="0"/>
                     </a:p>
                   </a:txBody>
@@ -17526,80 +17266,7 @@
                 </a:tc>
                 <a:extLst>
                   <a:ext uri="{0D108BD9-81ED-4DB2-BD59-A6C34878D82A}">
-                    <a16:rowId xmlns:a16="http://schemas.microsoft.com/office/drawing/2014/main" val="639321669"/>
-                  </a:ext>
-                </a:extLst>
-              </a:tr>
-              <a:tr h="630000">
-                <a:tc>
-                  <a:txBody>
-                    <a:bodyPr/>
-                    <a:lstStyle/>
-                    <a:p>
-                      <a:r>
-                        <a:rPr lang="en-US" altLang="zh-CN" dirty="0" smtClean="0"/>
-                        <a:t>H-DQN </a:t>
-                      </a:r>
-                      <a:endParaRPr lang="zh-CN" altLang="en-US" dirty="0"/>
-                    </a:p>
-                  </a:txBody>
-                  <a:tcPr/>
-                </a:tc>
-                <a:tc>
-                  <a:txBody>
-                    <a:bodyPr/>
-                    <a:lstStyle/>
-                    <a:p>
-                      <a:r>
-                        <a:rPr lang="zh-CN" altLang="en-US" dirty="0" smtClean="0"/>
-                        <a:t>内部奖励</a:t>
-                      </a:r>
-                      <a:r>
-                        <a:rPr lang="en-US" altLang="zh-CN" dirty="0" smtClean="0"/>
-                        <a:t>, </a:t>
-                      </a:r>
-                      <a:r>
-                        <a:rPr lang="zh-CN" altLang="en-US" dirty="0" smtClean="0"/>
-                        <a:t>外部奖励</a:t>
-                      </a:r>
-                      <a:endParaRPr lang="zh-CN" altLang="en-US" dirty="0"/>
-                    </a:p>
-                  </a:txBody>
-                  <a:tcPr/>
-                </a:tc>
-                <a:tc>
-                  <a:txBody>
-                    <a:bodyPr/>
-                    <a:lstStyle/>
-                    <a:p>
-                      <a:r>
-                        <a:rPr lang="zh-CN" altLang="en-US" dirty="0" smtClean="0"/>
-                        <a:t>我们不是内外</a:t>
-                      </a:r>
-                      <a:r>
-                        <a:rPr lang="en-US" altLang="zh-CN" dirty="0" smtClean="0"/>
-                        <a:t>, </a:t>
-                      </a:r>
-                      <a:r>
-                        <a:rPr lang="zh-CN" altLang="en-US" dirty="0" smtClean="0"/>
-                        <a:t>是前后两层</a:t>
-                      </a:r>
-                      <a:r>
-                        <a:rPr lang="en-US" altLang="zh-CN" dirty="0" smtClean="0"/>
-                        <a:t>.</a:t>
-                      </a:r>
-                      <a:r>
-                        <a:rPr lang="en-US" altLang="zh-CN" baseline="0" dirty="0" smtClean="0"/>
-                        <a:t>  </a:t>
-                      </a:r>
-                      <a:endParaRPr lang="zh-CN" altLang="en-US" dirty="0"/>
-                    </a:p>
-                  </a:txBody>
-                  <a:tcPr/>
-                </a:tc>
-                <a:extLst>
-                  <a:ext uri="{0D108BD9-81ED-4DB2-BD59-A6C34878D82A}">
-                    <a16:rowId xmlns:a16="http://schemas.microsoft.com/office/drawing/2014/main" val="1854592450"/>
+                    <a16:rowId xmlns:a16="http://schemas.microsoft.com/office/drawing/2014/main" val="76742609"/>
                   </a:ext>
                 </a:extLst>
               </a:tr>
@@ -17610,7 +17277,7 @@
     </p:spTree>
     <p:extLst>
       <p:ext uri="{BB962C8B-B14F-4D97-AF65-F5344CB8AC3E}">
-        <p14:creationId xmlns:p14="http://schemas.microsoft.com/office/powerpoint/2010/main" val="3115143314"/>
+        <p14:creationId xmlns:p14="http://schemas.microsoft.com/office/powerpoint/2010/main" val="2043460487"/>
       </p:ext>
     </p:extLst>
   </p:cSld>
@@ -17620,7 +17287,7 @@
 </p:sld>
 </file>
 
-<file path=ppt/slides/slide6.xml><?xml version="1.0" encoding="utf-8"?>
+<file path=ppt/slides/slide5.xml><?xml version="1.0" encoding="utf-8"?>
 <p:sld xmlns:a="http://schemas.openxmlformats.org/drawingml/2006/main" xmlns:r="http://schemas.openxmlformats.org/officeDocument/2006/relationships" xmlns:p="http://schemas.openxmlformats.org/presentationml/2006/main">
   <p:cSld>
     <p:spTree>
@@ -18018,7 +17685,7 @@
 </p:sld>
 </file>
 
-<file path=ppt/slides/slide7.xml><?xml version="1.0" encoding="utf-8"?>
+<file path=ppt/slides/slide6.xml><?xml version="1.0" encoding="utf-8"?>
 <p:sld xmlns:a="http://schemas.openxmlformats.org/drawingml/2006/main" xmlns:r="http://schemas.openxmlformats.org/officeDocument/2006/relationships" xmlns:p="http://schemas.openxmlformats.org/presentationml/2006/main">
   <p:cSld>
     <p:spTree>
@@ -18248,7 +17915,7 @@
 </p:sld>
 </file>
 
-<file path=ppt/slides/slide8.xml><?xml version="1.0" encoding="utf-8"?>
+<file path=ppt/slides/slide7.xml><?xml version="1.0" encoding="utf-8"?>
 <p:sld xmlns:a="http://schemas.openxmlformats.org/drawingml/2006/main" xmlns:r="http://schemas.openxmlformats.org/officeDocument/2006/relationships" xmlns:p="http://schemas.openxmlformats.org/presentationml/2006/main">
   <p:cSld>
     <p:spTree>
@@ -18305,107 +17972,10 @@
           </a:bodyPr>
           <a:lstStyle/>
           <a:p>
-            <a:pPr marL="514350" lvl="0" indent="-514350">
-              <a:buAutoNum type="arabicPeriod"/>
+            <a:pPr marL="0" lvl="0" indent="0">
+              <a:buNone/>
             </a:pPr>
-            <a:r>
-              <a:rPr lang="en-US" altLang="zh-CN" dirty="0" smtClean="0"/>
-              <a:t>Topic </a:t>
-            </a:r>
-            <a:r>
-              <a:rPr lang="zh-CN" altLang="en-US" dirty="0" smtClean="0"/>
-              <a:t>就叫 </a:t>
-            </a:r>
-            <a:r>
-              <a:rPr lang="en-US" altLang="zh-CN" dirty="0"/>
-              <a:t>Hierarchical Scheduler </a:t>
-            </a:r>
-            <a:r>
-              <a:rPr lang="en-US" altLang="zh-CN" dirty="0" smtClean="0"/>
-              <a:t>for deep learning training Resource </a:t>
-            </a:r>
-            <a:r>
-              <a:rPr lang="en-US" altLang="zh-CN" dirty="0"/>
-              <a:t>Allocation And </a:t>
-            </a:r>
-            <a:r>
-              <a:rPr lang="en-US" altLang="zh-CN" dirty="0" smtClean="0"/>
-              <a:t>Placement </a:t>
-            </a:r>
-            <a:r>
-              <a:rPr lang="zh-CN" altLang="en-US" dirty="0" smtClean="0"/>
-              <a:t>可以吗</a:t>
-            </a:r>
-            <a:r>
-              <a:rPr lang="en-US" altLang="zh-CN" dirty="0" smtClean="0"/>
-              <a:t>(</a:t>
-            </a:r>
-            <a:r>
-              <a:rPr lang="zh-CN" altLang="en-US" dirty="0" smtClean="0"/>
-              <a:t>什么场景</a:t>
-            </a:r>
-            <a:r>
-              <a:rPr lang="en-US" altLang="zh-CN" dirty="0" smtClean="0"/>
-              <a:t>? For deep learning training)</a:t>
-            </a:r>
-          </a:p>
-          <a:p>
-            <a:pPr marL="514350" lvl="0" indent="-514350">
-              <a:buAutoNum type="arabicPeriod"/>
-            </a:pPr>
-            <a:r>
-              <a:rPr lang="zh-CN" altLang="en-US" dirty="0"/>
-              <a:t>能</a:t>
-            </a:r>
-            <a:r>
-              <a:rPr lang="zh-CN" altLang="en-US" dirty="0" smtClean="0"/>
-              <a:t>加老师微信吗</a:t>
-            </a:r>
-            <a:r>
-              <a:rPr lang="en-US" altLang="zh-CN" dirty="0" smtClean="0"/>
-              <a:t>?</a:t>
-            </a:r>
-          </a:p>
-          <a:p>
-            <a:pPr marL="514350" lvl="0" indent="-514350">
-              <a:buAutoNum type="arabicPeriod"/>
-            </a:pPr>
-            <a:r>
-              <a:rPr lang="en-US" altLang="zh-CN" dirty="0" smtClean="0"/>
-              <a:t>Online</a:t>
-            </a:r>
-            <a:r>
-              <a:rPr lang="zh-CN" altLang="en-US" dirty="0" smtClean="0"/>
-              <a:t>是不是不用做</a:t>
-            </a:r>
-            <a:r>
-              <a:rPr lang="en-US" altLang="zh-CN" dirty="0" smtClean="0"/>
-              <a:t>? K8s</a:t>
-            </a:r>
-            <a:r>
-              <a:rPr lang="zh-CN" altLang="en-US" dirty="0" smtClean="0"/>
-              <a:t>需要集群</a:t>
-            </a:r>
-            <a:r>
-              <a:rPr lang="en-US" altLang="zh-CN" dirty="0" smtClean="0"/>
-              <a:t>, </a:t>
-            </a:r>
-            <a:r>
-              <a:rPr lang="zh-CN" altLang="en-US" dirty="0" smtClean="0"/>
-              <a:t>可能需要修改源码</a:t>
-            </a:r>
-            <a:r>
-              <a:rPr lang="en-US" altLang="zh-CN" dirty="0" smtClean="0"/>
-              <a:t>? </a:t>
-            </a:r>
-            <a:r>
-              <a:rPr lang="zh-CN" altLang="en-US" dirty="0" smtClean="0"/>
-              <a:t>就做</a:t>
-            </a:r>
-            <a:r>
-              <a:rPr lang="en-US" altLang="zh-CN" dirty="0" smtClean="0"/>
-              <a:t>offline.</a:t>
-            </a:r>
+            <a:endParaRPr lang="en-US" altLang="zh-CN" dirty="0" smtClean="0"/>
           </a:p>
         </p:txBody>
       </p:sp>

--- a/week report/8.11 report.pptx
+++ b/week report/8.11 report.pptx
@@ -5,16 +5,18 @@
     <p:sldMasterId id="2147483648" r:id="rId1"/>
   </p:sldMasterIdLst>
   <p:notesMasterIdLst>
-    <p:notesMasterId r:id="rId9"/>
+    <p:notesMasterId r:id="rId11"/>
   </p:notesMasterIdLst>
   <p:sldIdLst>
     <p:sldId id="263" r:id="rId2"/>
     <p:sldId id="269" r:id="rId3"/>
     <p:sldId id="268" r:id="rId4"/>
-    <p:sldId id="275" r:id="rId5"/>
-    <p:sldId id="273" r:id="rId6"/>
-    <p:sldId id="274" r:id="rId7"/>
+    <p:sldId id="276" r:id="rId5"/>
+    <p:sldId id="277" r:id="rId6"/>
+    <p:sldId id="278" r:id="rId7"/>
     <p:sldId id="264" r:id="rId8"/>
+    <p:sldId id="273" r:id="rId9"/>
+    <p:sldId id="274" r:id="rId10"/>
   </p:sldIdLst>
   <p:sldSz cx="12192000" cy="6858000"/>
   <p:notesSz cx="6858000" cy="9144000"/>
@@ -203,7 +205,7 @@
           <a:p>
             <a:fld id="{F4BC8E43-2426-4AB4-B1DA-94A32D613D40}" type="datetimeFigureOut">
               <a:rPr lang="zh-CN" altLang="en-US" smtClean="0"/>
-              <a:t>2021/8/10</a:t>
+              <a:t>2021/8/11</a:t>
             </a:fld>
             <a:endParaRPr lang="zh-CN" altLang="en-US"/>
           </a:p>
@@ -515,10 +517,6 @@
           <a:bodyPr/>
           <a:lstStyle/>
           <a:p>
-            <a:r>
-              <a:rPr lang="en-US" altLang="zh-CN" dirty="0" smtClean="0"/>
-              <a:t>A HIERARCHICAL MODEL FOR DEVICE PLACEMENT2018</a:t>
-            </a:r>
             <a:endParaRPr lang="zh-CN" altLang="en-US" dirty="0"/>
           </a:p>
         </p:txBody>
@@ -717,7 +715,7 @@
     </p:spTree>
     <p:extLst>
       <p:ext uri="{BB962C8B-B14F-4D97-AF65-F5344CB8AC3E}">
-        <p14:creationId xmlns:p14="http://schemas.microsoft.com/office/powerpoint/2010/main" val="1852752284"/>
+        <p14:creationId xmlns:p14="http://schemas.microsoft.com/office/powerpoint/2010/main" val="675557681"/>
       </p:ext>
     </p:extLst>
   </p:cSld>
@@ -728,6 +726,210 @@
 </file>
 
 <file path=ppt/notesSlides/notesSlide4.xml><?xml version="1.0" encoding="utf-8"?>
+<p:notes xmlns:a="http://schemas.openxmlformats.org/drawingml/2006/main" xmlns:r="http://schemas.openxmlformats.org/officeDocument/2006/relationships" xmlns:p="http://schemas.openxmlformats.org/presentationml/2006/main">
+  <p:cSld>
+    <p:spTree>
+      <p:nvGrpSpPr>
+        <p:cNvPr id="1" name=""/>
+        <p:cNvGrpSpPr/>
+        <p:nvPr/>
+      </p:nvGrpSpPr>
+      <p:grpSpPr>
+        <a:xfrm>
+          <a:off x="0" y="0"/>
+          <a:ext cx="0" cy="0"/>
+          <a:chOff x="0" y="0"/>
+          <a:chExt cx="0" cy="0"/>
+        </a:xfrm>
+      </p:grpSpPr>
+      <p:sp>
+        <p:nvSpPr>
+          <p:cNvPr id="2" name="幻灯片图像占位符 1"/>
+          <p:cNvSpPr>
+            <a:spLocks noGrp="1" noRot="1" noChangeAspect="1"/>
+          </p:cNvSpPr>
+          <p:nvPr>
+            <p:ph type="sldImg"/>
+          </p:nvPr>
+        </p:nvSpPr>
+        <p:spPr/>
+      </p:sp>
+      <p:sp>
+        <p:nvSpPr>
+          <p:cNvPr id="3" name="备注占位符 2"/>
+          <p:cNvSpPr>
+            <a:spLocks noGrp="1"/>
+          </p:cNvSpPr>
+          <p:nvPr>
+            <p:ph type="body" idx="1"/>
+          </p:nvPr>
+        </p:nvSpPr>
+        <p:spPr/>
+        <p:txBody>
+          <a:bodyPr/>
+          <a:lstStyle/>
+          <a:p>
+            <a:r>
+              <a:rPr lang="en-US" altLang="zh-CN" sz="1200" b="0" i="0" kern="1200" dirty="0" smtClean="0">
+                <a:solidFill>
+                  <a:schemeClr val="tx1"/>
+                </a:solidFill>
+                <a:effectLst/>
+                <a:latin typeface="+mn-lt"/>
+                <a:ea typeface="+mn-ea"/>
+                <a:cs typeface="+mn-cs"/>
+              </a:rPr>
+              <a:t>Narayanan et al., 2020 proposed Gavel, a heterogeneity-aware cluster scheduler that can optimize </a:t>
+            </a:r>
+            <a:r>
+              <a:rPr lang="en-US" altLang="zh-CN" sz="1200" b="0" i="0" kern="1200" dirty="0" err="1" smtClean="0">
+                <a:solidFill>
+                  <a:schemeClr val="tx1"/>
+                </a:solidFill>
+                <a:effectLst/>
+                <a:latin typeface="+mn-lt"/>
+                <a:ea typeface="+mn-ea"/>
+                <a:cs typeface="+mn-cs"/>
+              </a:rPr>
+              <a:t>makespan</a:t>
+            </a:r>
+            <a:r>
+              <a:rPr lang="en-US" altLang="zh-CN" sz="1200" b="0" i="0" kern="1200" dirty="0" smtClean="0">
+                <a:solidFill>
+                  <a:schemeClr val="tx1"/>
+                </a:solidFill>
+                <a:effectLst/>
+                <a:latin typeface="+mn-lt"/>
+                <a:ea typeface="+mn-ea"/>
+                <a:cs typeface="+mn-cs"/>
+              </a:rPr>
+              <a:t>.</a:t>
+            </a:r>
+            <a:endParaRPr lang="zh-CN" altLang="en-US" dirty="0"/>
+          </a:p>
+        </p:txBody>
+      </p:sp>
+      <p:sp>
+        <p:nvSpPr>
+          <p:cNvPr id="4" name="灯片编号占位符 3"/>
+          <p:cNvSpPr>
+            <a:spLocks noGrp="1"/>
+          </p:cNvSpPr>
+          <p:nvPr>
+            <p:ph type="sldNum" sz="quarter" idx="10"/>
+          </p:nvPr>
+        </p:nvSpPr>
+        <p:spPr/>
+        <p:txBody>
+          <a:bodyPr/>
+          <a:lstStyle/>
+          <a:p>
+            <a:fld id="{5CF06ACB-586E-4135-A9BA-C2B440FB252A}" type="slidenum">
+              <a:rPr lang="zh-CN" altLang="en-US" smtClean="0"/>
+              <a:t>5</a:t>
+            </a:fld>
+            <a:endParaRPr lang="zh-CN" altLang="en-US"/>
+          </a:p>
+        </p:txBody>
+      </p:sp>
+    </p:spTree>
+    <p:extLst>
+      <p:ext uri="{BB962C8B-B14F-4D97-AF65-F5344CB8AC3E}">
+        <p14:creationId xmlns:p14="http://schemas.microsoft.com/office/powerpoint/2010/main" val="758325938"/>
+      </p:ext>
+    </p:extLst>
+  </p:cSld>
+  <p:clrMapOvr>
+    <a:masterClrMapping/>
+  </p:clrMapOvr>
+</p:notes>
+</file>
+
+<file path=ppt/notesSlides/notesSlide5.xml><?xml version="1.0" encoding="utf-8"?>
+<p:notes xmlns:a="http://schemas.openxmlformats.org/drawingml/2006/main" xmlns:r="http://schemas.openxmlformats.org/officeDocument/2006/relationships" xmlns:p="http://schemas.openxmlformats.org/presentationml/2006/main">
+  <p:cSld>
+    <p:spTree>
+      <p:nvGrpSpPr>
+        <p:cNvPr id="1" name=""/>
+        <p:cNvGrpSpPr/>
+        <p:nvPr/>
+      </p:nvGrpSpPr>
+      <p:grpSpPr>
+        <a:xfrm>
+          <a:off x="0" y="0"/>
+          <a:ext cx="0" cy="0"/>
+          <a:chOff x="0" y="0"/>
+          <a:chExt cx="0" cy="0"/>
+        </a:xfrm>
+      </p:grpSpPr>
+      <p:sp>
+        <p:nvSpPr>
+          <p:cNvPr id="2" name="幻灯片图像占位符 1"/>
+          <p:cNvSpPr>
+            <a:spLocks noGrp="1" noRot="1" noChangeAspect="1"/>
+          </p:cNvSpPr>
+          <p:nvPr>
+            <p:ph type="sldImg"/>
+          </p:nvPr>
+        </p:nvSpPr>
+        <p:spPr/>
+      </p:sp>
+      <p:sp>
+        <p:nvSpPr>
+          <p:cNvPr id="3" name="备注占位符 2"/>
+          <p:cNvSpPr>
+            <a:spLocks noGrp="1"/>
+          </p:cNvSpPr>
+          <p:nvPr>
+            <p:ph type="body" idx="1"/>
+          </p:nvPr>
+        </p:nvSpPr>
+        <p:spPr/>
+        <p:txBody>
+          <a:bodyPr/>
+          <a:lstStyle/>
+          <a:p>
+            <a:endParaRPr lang="zh-CN" altLang="en-US" dirty="0"/>
+          </a:p>
+        </p:txBody>
+      </p:sp>
+      <p:sp>
+        <p:nvSpPr>
+          <p:cNvPr id="4" name="灯片编号占位符 3"/>
+          <p:cNvSpPr>
+            <a:spLocks noGrp="1"/>
+          </p:cNvSpPr>
+          <p:nvPr>
+            <p:ph type="sldNum" sz="quarter" idx="10"/>
+          </p:nvPr>
+        </p:nvSpPr>
+        <p:spPr/>
+        <p:txBody>
+          <a:bodyPr/>
+          <a:lstStyle/>
+          <a:p>
+            <a:fld id="{5CF06ACB-586E-4135-A9BA-C2B440FB252A}" type="slidenum">
+              <a:rPr lang="zh-CN" altLang="en-US" smtClean="0"/>
+              <a:t>6</a:t>
+            </a:fld>
+            <a:endParaRPr lang="zh-CN" altLang="en-US"/>
+          </a:p>
+        </p:txBody>
+      </p:sp>
+    </p:spTree>
+    <p:extLst>
+      <p:ext uri="{BB962C8B-B14F-4D97-AF65-F5344CB8AC3E}">
+        <p14:creationId xmlns:p14="http://schemas.microsoft.com/office/powerpoint/2010/main" val="890949900"/>
+      </p:ext>
+    </p:extLst>
+  </p:cSld>
+  <p:clrMapOvr>
+    <a:masterClrMapping/>
+  </p:clrMapOvr>
+</p:notes>
+</file>
+
+<file path=ppt/notesSlides/notesSlide6.xml><?xml version="1.0" encoding="utf-8"?>
 <p:notes xmlns:a="http://schemas.openxmlformats.org/drawingml/2006/main" xmlns:r="http://schemas.openxmlformats.org/officeDocument/2006/relationships" xmlns:p="http://schemas.openxmlformats.org/presentationml/2006/main">
   <p:cSld>
     <p:spTree>
@@ -942,7 +1144,7 @@
           <a:p>
             <a:fld id="{DCC080BC-FD8F-4BC7-912D-250C973482EE}" type="datetimeFigureOut">
               <a:rPr lang="zh-CN" altLang="en-US" smtClean="0"/>
-              <a:t>2021/8/10</a:t>
+              <a:t>2021/8/11</a:t>
             </a:fld>
             <a:endParaRPr lang="zh-CN" altLang="en-US"/>
           </a:p>
@@ -1112,7 +1314,7 @@
           <a:p>
             <a:fld id="{DCC080BC-FD8F-4BC7-912D-250C973482EE}" type="datetimeFigureOut">
               <a:rPr lang="zh-CN" altLang="en-US" smtClean="0"/>
-              <a:t>2021/8/10</a:t>
+              <a:t>2021/8/11</a:t>
             </a:fld>
             <a:endParaRPr lang="zh-CN" altLang="en-US"/>
           </a:p>
@@ -1292,7 +1494,7 @@
           <a:p>
             <a:fld id="{DCC080BC-FD8F-4BC7-912D-250C973482EE}" type="datetimeFigureOut">
               <a:rPr lang="zh-CN" altLang="en-US" smtClean="0"/>
-              <a:t>2021/8/10</a:t>
+              <a:t>2021/8/11</a:t>
             </a:fld>
             <a:endParaRPr lang="zh-CN" altLang="en-US"/>
           </a:p>
@@ -1462,7 +1664,7 @@
           <a:p>
             <a:fld id="{DCC080BC-FD8F-4BC7-912D-250C973482EE}" type="datetimeFigureOut">
               <a:rPr lang="zh-CN" altLang="en-US" smtClean="0"/>
-              <a:t>2021/8/10</a:t>
+              <a:t>2021/8/11</a:t>
             </a:fld>
             <a:endParaRPr lang="zh-CN" altLang="en-US"/>
           </a:p>
@@ -1708,7 +1910,7 @@
           <a:p>
             <a:fld id="{DCC080BC-FD8F-4BC7-912D-250C973482EE}" type="datetimeFigureOut">
               <a:rPr lang="zh-CN" altLang="en-US" smtClean="0"/>
-              <a:t>2021/8/10</a:t>
+              <a:t>2021/8/11</a:t>
             </a:fld>
             <a:endParaRPr lang="zh-CN" altLang="en-US"/>
           </a:p>
@@ -1940,7 +2142,7 @@
           <a:p>
             <a:fld id="{DCC080BC-FD8F-4BC7-912D-250C973482EE}" type="datetimeFigureOut">
               <a:rPr lang="zh-CN" altLang="en-US" smtClean="0"/>
-              <a:t>2021/8/10</a:t>
+              <a:t>2021/8/11</a:t>
             </a:fld>
             <a:endParaRPr lang="zh-CN" altLang="en-US"/>
           </a:p>
@@ -2307,7 +2509,7 @@
           <a:p>
             <a:fld id="{DCC080BC-FD8F-4BC7-912D-250C973482EE}" type="datetimeFigureOut">
               <a:rPr lang="zh-CN" altLang="en-US" smtClean="0"/>
-              <a:t>2021/8/10</a:t>
+              <a:t>2021/8/11</a:t>
             </a:fld>
             <a:endParaRPr lang="zh-CN" altLang="en-US"/>
           </a:p>
@@ -2425,7 +2627,7 @@
           <a:p>
             <a:fld id="{DCC080BC-FD8F-4BC7-912D-250C973482EE}" type="datetimeFigureOut">
               <a:rPr lang="zh-CN" altLang="en-US" smtClean="0"/>
-              <a:t>2021/8/10</a:t>
+              <a:t>2021/8/11</a:t>
             </a:fld>
             <a:endParaRPr lang="zh-CN" altLang="en-US"/>
           </a:p>
@@ -2520,7 +2722,7 @@
           <a:p>
             <a:fld id="{DCC080BC-FD8F-4BC7-912D-250C973482EE}" type="datetimeFigureOut">
               <a:rPr lang="zh-CN" altLang="en-US" smtClean="0"/>
-              <a:t>2021/8/10</a:t>
+              <a:t>2021/8/11</a:t>
             </a:fld>
             <a:endParaRPr lang="zh-CN" altLang="en-US"/>
           </a:p>
@@ -2797,7 +2999,7 @@
           <a:p>
             <a:fld id="{DCC080BC-FD8F-4BC7-912D-250C973482EE}" type="datetimeFigureOut">
               <a:rPr lang="zh-CN" altLang="en-US" smtClean="0"/>
-              <a:t>2021/8/10</a:t>
+              <a:t>2021/8/11</a:t>
             </a:fld>
             <a:endParaRPr lang="zh-CN" altLang="en-US"/>
           </a:p>
@@ -3050,7 +3252,7 @@
           <a:p>
             <a:fld id="{DCC080BC-FD8F-4BC7-912D-250C973482EE}" type="datetimeFigureOut">
               <a:rPr lang="zh-CN" altLang="en-US" smtClean="0"/>
-              <a:t>2021/8/10</a:t>
+              <a:t>2021/8/11</a:t>
             </a:fld>
             <a:endParaRPr lang="zh-CN" altLang="en-US"/>
           </a:p>
@@ -3263,7 +3465,7 @@
           <a:p>
             <a:fld id="{DCC080BC-FD8F-4BC7-912D-250C973482EE}" type="datetimeFigureOut">
               <a:rPr lang="zh-CN" altLang="en-US" smtClean="0"/>
-              <a:t>2021/8/10</a:t>
+              <a:t>2021/8/11</a:t>
             </a:fld>
             <a:endParaRPr lang="zh-CN" altLang="en-US"/>
           </a:p>
@@ -16369,7 +16571,7 @@
           <a:p>
             <a:fld id="{7E66CBCB-337D-49B6-B73D-DC76D0E029C4}" type="datetime1">
               <a:rPr lang="zh-CN" altLang="en-US" smtClean="0"/>
-              <a:t>2021/8/10</a:t>
+              <a:t>2021/8/11</a:t>
             </a:fld>
             <a:endParaRPr lang="zh-CN" altLang="en-US" dirty="0"/>
           </a:p>
@@ -16485,15 +16687,23 @@
           <a:p>
             <a:r>
               <a:rPr lang="zh-CN" altLang="en-US" dirty="0" smtClean="0"/>
-              <a:t>调研最近几年</a:t>
-            </a:r>
-            <a:r>
-              <a:rPr lang="en-US" altLang="zh-CN" dirty="0" smtClean="0"/>
-              <a:t>DRL</a:t>
+              <a:t>调研最</a:t>
             </a:r>
             <a:r>
               <a:rPr lang="zh-CN" altLang="en-US" dirty="0" smtClean="0"/>
-              <a:t>中网络的选用</a:t>
+              <a:t>近几年</a:t>
+            </a:r>
+            <a:r>
+              <a:rPr lang="zh-CN" altLang="en-US" dirty="0" smtClean="0"/>
+              <a:t>深度强化学习</a:t>
+            </a:r>
+            <a:r>
+              <a:rPr lang="zh-CN" altLang="en-US" dirty="0" smtClean="0"/>
+              <a:t>中网络和更新算法的</a:t>
+            </a:r>
+            <a:r>
+              <a:rPr lang="zh-CN" altLang="en-US" dirty="0" smtClean="0"/>
+              <a:t>选用</a:t>
             </a:r>
             <a:r>
               <a:rPr lang="en-US" altLang="zh-CN" dirty="0" smtClean="0"/>
@@ -16504,23 +16714,59 @@
               <a:t> </a:t>
             </a:r>
             <a:r>
-              <a:rPr lang="zh-CN" altLang="en-US" dirty="0"/>
-              <a:t>从</a:t>
+              <a:rPr lang="zh-CN" altLang="en-US" dirty="0" smtClean="0"/>
+              <a:t>目前最优的是</a:t>
+            </a:r>
+            <a:r>
+              <a:rPr lang="en-US" altLang="zh-CN" dirty="0" smtClean="0"/>
+              <a:t>SAC</a:t>
             </a:r>
             <a:r>
               <a:rPr lang="zh-CN" altLang="en-US" dirty="0" smtClean="0"/>
-              <a:t>他们的代码中找一些实现</a:t>
+              <a:t>和</a:t>
             </a:r>
             <a:r>
               <a:rPr lang="en-US" altLang="zh-CN" dirty="0" smtClean="0"/>
-              <a:t>.</a:t>
+              <a:t>PPO, </a:t>
             </a:r>
-            <a:endParaRPr lang="en-US" altLang="zh-CN" dirty="0" smtClean="0"/>
+            <a:r>
+              <a:rPr lang="zh-CN" altLang="en-US" dirty="0" smtClean="0"/>
+              <a:t>事实上随机策略</a:t>
+            </a:r>
+            <a:r>
+              <a:rPr lang="en-US" altLang="zh-CN" dirty="0" smtClean="0"/>
+              <a:t>, </a:t>
+            </a:r>
+            <a:r>
+              <a:rPr lang="zh-CN" altLang="en-US" dirty="0" smtClean="0"/>
+              <a:t>熵正则化</a:t>
+            </a:r>
+            <a:r>
+              <a:rPr lang="en-US" altLang="zh-CN" dirty="0" smtClean="0"/>
+              <a:t>, </a:t>
+            </a:r>
+            <a:r>
+              <a:rPr lang="zh-CN" altLang="en-US" dirty="0" smtClean="0"/>
+              <a:t>经验回放这些技巧也都用在了</a:t>
+            </a:r>
+            <a:r>
+              <a:rPr lang="en-US" altLang="zh-CN" dirty="0" smtClean="0"/>
+              <a:t>DL2</a:t>
+            </a:r>
+            <a:r>
+              <a:rPr lang="zh-CN" altLang="en-US" dirty="0" smtClean="0"/>
+              <a:t>中</a:t>
+            </a:r>
+            <a:r>
+              <a:rPr lang="en-US" altLang="zh-CN" dirty="0" smtClean="0"/>
+              <a:t>. </a:t>
+            </a:r>
+            <a:endParaRPr lang="en-US" altLang="zh-CN" dirty="0"/>
           </a:p>
           <a:p>
             <a:r>
-              <a:rPr lang="zh-CN" altLang="en-US" dirty="0" smtClean="0"/>
-              <a:t>代码</a:t>
+              <a:rPr lang="zh-CN" altLang="en-US" dirty="0"/>
+              <a:t>强化学习</a:t>
             </a:r>
             <a:r>
               <a:rPr lang="en-US" altLang="zh-CN" dirty="0" err="1" smtClean="0"/>
@@ -16528,12 +16774,29 @@
             </a:r>
             <a:r>
               <a:rPr lang="zh-CN" altLang="en-US" dirty="0" smtClean="0"/>
-              <a:t>的设计</a:t>
+              <a:t>的</a:t>
+            </a:r>
+            <a:r>
+              <a:rPr lang="zh-CN" altLang="en-US" dirty="0" smtClean="0"/>
+              <a:t>设计</a:t>
             </a:r>
             <a:r>
               <a:rPr lang="en-US" altLang="zh-CN" dirty="0" smtClean="0"/>
-              <a:t>. </a:t>
+              <a:t>,</a:t>
             </a:r>
+            <a:r>
+              <a:rPr lang="zh-CN" altLang="en-US" dirty="0" smtClean="0"/>
+              <a:t>给调度器</a:t>
+            </a:r>
+            <a:r>
+              <a:rPr lang="en-US" altLang="zh-CN" dirty="0" smtClean="0"/>
+              <a:t>reward.</a:t>
+            </a:r>
+            <a:r>
+              <a:rPr lang="en-US" altLang="zh-CN" dirty="0" smtClean="0"/>
+              <a:t> </a:t>
+            </a:r>
+            <a:endParaRPr lang="en-US" altLang="zh-CN" dirty="0" smtClean="0"/>
           </a:p>
           <a:p>
             <a:pPr marL="0" indent="0">
@@ -16609,14 +16872,14 @@
           <p:nvPr>
             <p:extLst>
               <p:ext uri="{D42A27DB-BD31-4B8C-83A1-F6EECF244321}">
-                <p14:modId xmlns:p14="http://schemas.microsoft.com/office/powerpoint/2010/main" val="3245545239"/>
+                <p14:modId xmlns:p14="http://schemas.microsoft.com/office/powerpoint/2010/main" val="2216645139"/>
               </p:ext>
             </p:extLst>
           </p:nvPr>
         </p:nvGraphicFramePr>
         <p:xfrm>
-          <a:off x="838200" y="1752598"/>
-          <a:ext cx="9398001" cy="1900080"/>
+          <a:off x="419100" y="1752598"/>
+          <a:ext cx="11556999" cy="4164275"/>
         </p:xfrm>
         <a:graphic>
           <a:graphicData uri="http://schemas.openxmlformats.org/drawingml/2006/table">
@@ -16625,21 +16888,21 @@
                 <a:tableStyleId>{5C22544A-7EE6-4342-B048-85BDC9FD1C3A}</a:tableStyleId>
               </a:tblPr>
               <a:tblGrid>
-                <a:gridCol w="3132667">
+                <a:gridCol w="3852333">
                   <a:extLst>
                     <a:ext uri="{9D8B030D-6E8A-4147-A177-3AD203B41FA5}">
                       <a16:colId xmlns:a16="http://schemas.microsoft.com/office/drawing/2014/main" val="2104862403"/>
                     </a:ext>
                   </a:extLst>
                 </a:gridCol>
-                <a:gridCol w="3132667">
+                <a:gridCol w="3852333">
                   <a:extLst>
                     <a:ext uri="{9D8B030D-6E8A-4147-A177-3AD203B41FA5}">
                       <a16:colId xmlns:a16="http://schemas.microsoft.com/office/drawing/2014/main" val="3631488225"/>
                     </a:ext>
                   </a:extLst>
                 </a:gridCol>
-                <a:gridCol w="3132667">
+                <a:gridCol w="3852333">
                   <a:extLst>
                     <a:ext uri="{9D8B030D-6E8A-4147-A177-3AD203B41FA5}">
                       <a16:colId xmlns:a16="http://schemas.microsoft.com/office/drawing/2014/main" val="1593399558"/>
@@ -16647,7 +16910,7 @@
                   </a:extLst>
                 </a:gridCol>
               </a:tblGrid>
-              <a:tr h="630000">
+              <a:tr h="519486">
                 <a:tc>
                   <a:txBody>
                     <a:bodyPr/>
@@ -16692,7 +16955,7 @@
                   </a:ext>
                 </a:extLst>
               </a:tr>
-              <a:tr h="630000">
+              <a:tr h="993029">
                 <a:tc>
                   <a:txBody>
                     <a:bodyPr/>
@@ -16709,6 +16972,18 @@
                           <a:cs typeface="+mn-cs"/>
                         </a:rPr>
                         <a:t>Gandiva</a:t>
+                      </a:r>
+                      <a:r>
+                        <a:rPr lang="en-US" altLang="zh-CN" sz="1800" b="1" i="0" kern="1200" dirty="0" smtClean="0">
+                          <a:solidFill>
+                            <a:schemeClr val="dk1"/>
+                          </a:solidFill>
+                          <a:effectLst/>
+                          <a:latin typeface="+mn-lt"/>
+                          <a:ea typeface="+mn-ea"/>
+                          <a:cs typeface="+mn-cs"/>
+                        </a:rPr>
+                        <a:t>: Introspective Cluster Scheduling for Deep Learning 2018osdi18-xiao</a:t>
                       </a:r>
                       <a:endParaRPr lang="en-US" altLang="zh-CN" sz="1800" b="1" i="0" kern="1200" dirty="0">
                         <a:solidFill>
@@ -16749,8 +17024,92 @@
                         <a:t>时间</a:t>
                       </a:r>
                       <a:r>
-                        <a:rPr lang="en-US" altLang="zh-CN" smtClean="0"/>
+                        <a:rPr lang="en-US" altLang="zh-CN" dirty="0" smtClean="0"/>
                         <a:t>,</a:t>
+                      </a:r>
+                      <a:r>
+                        <a:rPr lang="zh-CN" altLang="en-US" sz="1800" b="0" i="0" kern="1200" dirty="0" smtClean="0">
+                          <a:solidFill>
+                            <a:schemeClr val="dk1"/>
+                          </a:solidFill>
+                          <a:effectLst/>
+                          <a:latin typeface="+mn-lt"/>
+                          <a:ea typeface="+mn-ea"/>
+                          <a:cs typeface="+mn-cs"/>
+                        </a:rPr>
+                        <a:t>让</a:t>
+                      </a:r>
+                      <a:r>
+                        <a:rPr lang="en-US" altLang="zh-CN" sz="1800" b="0" i="0" kern="1200" dirty="0" smtClean="0">
+                          <a:solidFill>
+                            <a:schemeClr val="dk1"/>
+                          </a:solidFill>
+                          <a:effectLst/>
+                          <a:latin typeface="+mn-lt"/>
+                          <a:ea typeface="+mn-ea"/>
+                          <a:cs typeface="+mn-cs"/>
+                        </a:rPr>
+                        <a:t>GPU</a:t>
+                      </a:r>
+                      <a:r>
+                        <a:rPr lang="zh-CN" altLang="en-US" sz="1800" b="0" i="0" kern="1200" dirty="0" smtClean="0">
+                          <a:solidFill>
+                            <a:schemeClr val="dk1"/>
+                          </a:solidFill>
+                          <a:effectLst/>
+                          <a:latin typeface="+mn-lt"/>
+                          <a:ea typeface="+mn-ea"/>
+                          <a:cs typeface="+mn-cs"/>
+                        </a:rPr>
+                        <a:t>时间分配和</a:t>
+                      </a:r>
+                      <a:r>
+                        <a:rPr lang="en-US" altLang="zh-CN" sz="1800" b="0" i="0" kern="1200" dirty="0" smtClean="0">
+                          <a:solidFill>
+                            <a:schemeClr val="dk1"/>
+                          </a:solidFill>
+                          <a:effectLst/>
+                          <a:latin typeface="+mn-lt"/>
+                          <a:ea typeface="+mn-ea"/>
+                          <a:cs typeface="+mn-cs"/>
+                        </a:rPr>
+                        <a:t>device placement</a:t>
+                      </a:r>
+                      <a:r>
+                        <a:rPr lang="zh-CN" altLang="en-US" sz="1800" b="0" i="0" kern="1200" dirty="0" smtClean="0">
+                          <a:solidFill>
+                            <a:schemeClr val="dk1"/>
+                          </a:solidFill>
+                          <a:effectLst/>
+                          <a:latin typeface="+mn-lt"/>
+                          <a:ea typeface="+mn-ea"/>
+                          <a:cs typeface="+mn-cs"/>
+                        </a:rPr>
+                        <a:t>之类的</a:t>
+                      </a:r>
+                      <a:r>
+                        <a:rPr lang="en-US" altLang="zh-CN" sz="1800" b="0" i="0" kern="1200" dirty="0" smtClean="0">
+                          <a:solidFill>
+                            <a:schemeClr val="dk1"/>
+                          </a:solidFill>
+                          <a:effectLst/>
+                          <a:latin typeface="+mn-lt"/>
+                          <a:ea typeface="+mn-ea"/>
+                          <a:cs typeface="+mn-cs"/>
+                        </a:rPr>
+                        <a:t>primitives</a:t>
+                      </a:r>
+                      <a:r>
+                        <a:rPr lang="zh-CN" altLang="en-US" sz="1800" b="0" i="0" kern="1200" dirty="0" smtClean="0">
+                          <a:solidFill>
+                            <a:schemeClr val="dk1"/>
+                          </a:solidFill>
+                          <a:effectLst/>
+                          <a:latin typeface="+mn-lt"/>
+                          <a:ea typeface="+mn-ea"/>
+                          <a:cs typeface="+mn-cs"/>
+                        </a:rPr>
+                        <a:t>更加高效和实用</a:t>
                       </a:r>
                       <a:endParaRPr lang="zh-CN" altLang="en-US" dirty="0"/>
                     </a:p>
@@ -16762,6 +17121,22 @@
                     <a:bodyPr/>
                     <a:lstStyle/>
                     <a:p>
+                      <a:r>
+                        <a:rPr lang="zh-CN" altLang="en-US" dirty="0" smtClean="0"/>
+                        <a:t>可以参考动态迁移</a:t>
+                      </a:r>
+                      <a:r>
+                        <a:rPr lang="en-US" altLang="zh-CN" dirty="0" smtClean="0"/>
+                        <a:t>,GPU</a:t>
+                      </a:r>
+                      <a:r>
+                        <a:rPr lang="zh-CN" altLang="en-US" dirty="0" smtClean="0"/>
+                        <a:t>分配和</a:t>
+                      </a:r>
+                      <a:r>
+                        <a:rPr lang="en-US" altLang="zh-CN" dirty="0" smtClean="0"/>
+                        <a:t>device placement</a:t>
+                      </a:r>
                       <a:endParaRPr lang="zh-CN" altLang="en-US" dirty="0"/>
                     </a:p>
                   </a:txBody>
@@ -16773,11 +17148,66 @@
                   </a:ext>
                 </a:extLst>
               </a:tr>
-              <a:tr h="630000">
+              <a:tr h="519486">
                 <a:tc>
                   <a:txBody>
                     <a:bodyPr/>
                     <a:lstStyle/>
+                    <a:p>
+                      <a:pPr marL="0" marR="0" indent="0" algn="l" defTabSz="914400" rtl="0" eaLnBrk="1" fontAlgn="auto" latinLnBrk="0" hangingPunct="1">
+                        <a:lnSpc>
+                          <a:spcPct val="100000"/>
+                        </a:lnSpc>
+                        <a:spcBef>
+                          <a:spcPts val="0"/>
+                        </a:spcBef>
+                        <a:spcAft>
+                          <a:spcPts val="0"/>
+                        </a:spcAft>
+                        <a:buClrTx/>
+                        <a:buSzTx/>
+                        <a:buFontTx/>
+                        <a:buNone/>
+                        <a:tabLst/>
+                        <a:defRPr/>
+                      </a:pPr>
+                      <a:r>
+                        <a:rPr lang="en-US" altLang="zh-CN" sz="1800" b="1" i="0" kern="1200" dirty="0" smtClean="0">
+                          <a:solidFill>
+                            <a:schemeClr val="dk1"/>
+                          </a:solidFill>
+                          <a:effectLst/>
+                          <a:latin typeface="+mn-lt"/>
+                          <a:ea typeface="+mn-ea"/>
+                          <a:cs typeface="+mn-cs"/>
+                        </a:rPr>
+                        <a:t>Pollux: Co-adaptive Cluster Scheduling for </a:t>
+                      </a:r>
+                      <a:r>
+                        <a:rPr lang="en-US" altLang="zh-CN" sz="1800" b="1" i="0" kern="1200" dirty="0" err="1" smtClean="0">
+                          <a:solidFill>
+                            <a:schemeClr val="dk1"/>
+                          </a:solidFill>
+                          <a:effectLst/>
+                          <a:latin typeface="+mn-lt"/>
+                          <a:ea typeface="+mn-ea"/>
+                          <a:cs typeface="+mn-cs"/>
+                        </a:rPr>
+                        <a:t>Goodput</a:t>
+                      </a:r>
+                      <a:r>
+                        <a:rPr lang="en-US" altLang="zh-CN" sz="1800" b="1" i="0" kern="1200" dirty="0" smtClean="0">
+                          <a:solidFill>
+                            <a:schemeClr val="dk1"/>
+                          </a:solidFill>
+                          <a:effectLst/>
+                          <a:latin typeface="+mn-lt"/>
+                          <a:ea typeface="+mn-ea"/>
+                          <a:cs typeface="+mn-cs"/>
+                        </a:rPr>
+                        <a:t>-Optimized Deep Learning osdi2021</a:t>
+                      </a:r>
+                    </a:p>
                     <a:p>
                       <a:endParaRPr lang="zh-CN" altLang="en-US" dirty="0"/>
                     </a:p>
@@ -16789,6 +17219,54 @@
                     <a:bodyPr/>
                     <a:lstStyle/>
                     <a:p>
+                      <a:r>
+                        <a:rPr lang="zh-CN" altLang="en-US" dirty="0" smtClean="0"/>
+                        <a:t>引入新指标</a:t>
+                      </a:r>
+                      <a:r>
+                        <a:rPr lang="en-US" altLang="zh-CN" dirty="0" err="1" smtClean="0"/>
+                        <a:t>goodput</a:t>
+                      </a:r>
+                      <a:r>
+                        <a:rPr lang="en-US" altLang="zh-CN" dirty="0" smtClean="0"/>
+                        <a:t>,</a:t>
+                      </a:r>
+                      <a:r>
+                        <a:rPr lang="zh-CN" altLang="en-US" sz="1800" b="0" i="0" kern="1200" dirty="0" smtClean="0">
+                          <a:solidFill>
+                            <a:schemeClr val="dk1"/>
+                          </a:solidFill>
+                          <a:effectLst/>
+                          <a:latin typeface="+mn-lt"/>
+                          <a:ea typeface="+mn-ea"/>
+                          <a:cs typeface="+mn-cs"/>
+                        </a:rPr>
+                        <a:t>训练的效率以及资源决策和训练参数的相互依赖性是不可知的。 </a:t>
+                      </a:r>
+                      <a:r>
+                        <a:rPr lang="en-US" altLang="zh-CN" sz="1800" b="0" i="0" kern="1200" dirty="0" smtClean="0">
+                          <a:solidFill>
+                            <a:schemeClr val="dk1"/>
+                          </a:solidFill>
+                          <a:effectLst/>
+                          <a:latin typeface="+mn-lt"/>
+                          <a:ea typeface="+mn-ea"/>
+                          <a:cs typeface="+mn-cs"/>
+                        </a:rPr>
+                        <a:t>Pollux </a:t>
+                      </a:r>
+                      <a:r>
+                        <a:rPr lang="zh-CN" altLang="en-US" sz="1800" b="0" i="0" kern="1200" dirty="0" smtClean="0">
+                          <a:solidFill>
+                            <a:schemeClr val="dk1"/>
+                          </a:solidFill>
+                          <a:effectLst/>
+                          <a:latin typeface="+mn-lt"/>
+                          <a:ea typeface="+mn-ea"/>
+                          <a:cs typeface="+mn-cs"/>
+                        </a:rPr>
+                        <a:t>共同调整这些相互依赖的值，以提高吞吐量</a:t>
+                      </a:r>
                       <a:endParaRPr lang="zh-CN" altLang="en-US" dirty="0"/>
                     </a:p>
                   </a:txBody>
@@ -16799,6 +17277,126 @@
                     <a:bodyPr/>
                     <a:lstStyle/>
                     <a:p>
+                      <a:r>
+                        <a:rPr lang="zh-CN" altLang="en-US" sz="1800" b="0" i="0" kern="1200" dirty="0" smtClean="0">
+                          <a:solidFill>
+                            <a:schemeClr val="dk1"/>
+                          </a:solidFill>
+                          <a:effectLst/>
+                          <a:latin typeface="+mn-lt"/>
+                          <a:ea typeface="+mn-ea"/>
+                          <a:cs typeface="+mn-cs"/>
+                        </a:rPr>
+                        <a:t>他没有考虑</a:t>
+                      </a:r>
+                      <a:r>
+                        <a:rPr lang="en-US" altLang="zh-CN" sz="1800" b="0" i="0" kern="1200" dirty="0" smtClean="0">
+                          <a:solidFill>
+                            <a:schemeClr val="dk1"/>
+                          </a:solidFill>
+                          <a:effectLst/>
+                          <a:latin typeface="+mn-lt"/>
+                          <a:ea typeface="+mn-ea"/>
+                          <a:cs typeface="+mn-cs"/>
+                        </a:rPr>
+                        <a:t>device placement,</a:t>
+                      </a:r>
+                      <a:r>
+                        <a:rPr lang="zh-CN" altLang="en-US" sz="1800" b="0" i="0" kern="1200" dirty="0" smtClean="0">
+                          <a:solidFill>
+                            <a:schemeClr val="dk1"/>
+                          </a:solidFill>
+                          <a:effectLst/>
+                          <a:latin typeface="+mn-lt"/>
+                          <a:ea typeface="+mn-ea"/>
+                          <a:cs typeface="+mn-cs"/>
+                        </a:rPr>
+                        <a:t>目前我们对</a:t>
+                      </a:r>
+                      <a:r>
+                        <a:rPr lang="en-US" altLang="zh-CN" sz="1800" b="0" i="0" kern="1200" dirty="0" smtClean="0">
+                          <a:solidFill>
+                            <a:schemeClr val="dk1"/>
+                          </a:solidFill>
+                          <a:effectLst/>
+                          <a:latin typeface="+mn-lt"/>
+                          <a:ea typeface="+mn-ea"/>
+                          <a:cs typeface="+mn-cs"/>
+                        </a:rPr>
+                        <a:t>resource allocation</a:t>
+                      </a:r>
+                      <a:r>
+                        <a:rPr lang="zh-CN" altLang="en-US" sz="1800" b="0" i="0" kern="1200" dirty="0" smtClean="0">
+                          <a:solidFill>
+                            <a:schemeClr val="dk1"/>
+                          </a:solidFill>
+                          <a:effectLst/>
+                          <a:latin typeface="+mn-lt"/>
+                          <a:ea typeface="+mn-ea"/>
+                          <a:cs typeface="+mn-cs"/>
+                        </a:rPr>
+                        <a:t>和 </a:t>
+                      </a:r>
+                      <a:r>
+                        <a:rPr lang="en-US" altLang="zh-CN" sz="1800" b="0" i="0" kern="1200" dirty="0" smtClean="0">
+                          <a:solidFill>
+                            <a:schemeClr val="dk1"/>
+                          </a:solidFill>
+                          <a:effectLst/>
+                          <a:latin typeface="+mn-lt"/>
+                          <a:ea typeface="+mn-ea"/>
+                          <a:cs typeface="+mn-cs"/>
+                        </a:rPr>
+                        <a:t>placement</a:t>
+                      </a:r>
+                      <a:r>
+                        <a:rPr lang="zh-CN" altLang="en-US" sz="1800" b="0" i="0" kern="1200" dirty="0" smtClean="0">
+                          <a:solidFill>
+                            <a:schemeClr val="dk1"/>
+                          </a:solidFill>
+                          <a:effectLst/>
+                          <a:latin typeface="+mn-lt"/>
+                          <a:ea typeface="+mn-ea"/>
+                          <a:cs typeface="+mn-cs"/>
+                        </a:rPr>
+                        <a:t>互相的以来也是不可知的</a:t>
+                      </a:r>
+                      <a:r>
+                        <a:rPr lang="en-US" altLang="zh-CN" sz="1800" b="0" i="0" kern="1200" dirty="0" smtClean="0">
+                          <a:solidFill>
+                            <a:schemeClr val="dk1"/>
+                          </a:solidFill>
+                          <a:effectLst/>
+                          <a:latin typeface="+mn-lt"/>
+                          <a:ea typeface="+mn-ea"/>
+                          <a:cs typeface="+mn-cs"/>
+                        </a:rPr>
+                        <a:t>, </a:t>
+                      </a:r>
+                      <a:r>
+                        <a:rPr lang="zh-CN" altLang="en-US" sz="1800" b="0" i="0" kern="1200" dirty="0" smtClean="0">
+                          <a:solidFill>
+                            <a:schemeClr val="dk1"/>
+                          </a:solidFill>
+                          <a:effectLst/>
+                          <a:latin typeface="+mn-lt"/>
+                          <a:ea typeface="+mn-ea"/>
+                          <a:cs typeface="+mn-cs"/>
+                        </a:rPr>
+                        <a:t>所以我们需要共同调整</a:t>
+                      </a:r>
+                      <a:r>
+                        <a:rPr lang="en-US" altLang="zh-CN" sz="1800" b="0" i="0" kern="1200" dirty="0" smtClean="0">
+                          <a:solidFill>
+                            <a:schemeClr val="dk1"/>
+                          </a:solidFill>
+                          <a:effectLst/>
+                          <a:latin typeface="+mn-lt"/>
+                          <a:ea typeface="+mn-ea"/>
+                          <a:cs typeface="+mn-cs"/>
+                        </a:rPr>
+                        <a:t>. </a:t>
+                      </a:r>
                       <a:endParaRPr lang="zh-CN" altLang="en-US" dirty="0"/>
                     </a:p>
                   </a:txBody>
@@ -16807,6 +17405,194 @@
                 <a:extLst>
                   <a:ext uri="{0D108BD9-81ED-4DB2-BD59-A6C34878D82A}">
                     <a16:rowId xmlns:a16="http://schemas.microsoft.com/office/drawing/2014/main" val="487215583"/>
+                  </a:ext>
+                </a:extLst>
+              </a:tr>
+              <a:tr h="519486">
+                <a:tc>
+                  <a:txBody>
+                    <a:bodyPr/>
+                    <a:lstStyle/>
+                    <a:p>
+                      <a:pPr marL="0" marR="0" indent="0" algn="l" defTabSz="914400" rtl="0" eaLnBrk="1" fontAlgn="auto" latinLnBrk="0" hangingPunct="1">
+                        <a:lnSpc>
+                          <a:spcPct val="100000"/>
+                        </a:lnSpc>
+                        <a:spcBef>
+                          <a:spcPts val="0"/>
+                        </a:spcBef>
+                        <a:spcAft>
+                          <a:spcPts val="0"/>
+                        </a:spcAft>
+                        <a:buClrTx/>
+                        <a:buSzTx/>
+                        <a:buFontTx/>
+                        <a:buNone/>
+                        <a:tabLst/>
+                        <a:defRPr/>
+                      </a:pPr>
+                      <a:r>
+                        <a:rPr lang="en-US" altLang="zh-CN" sz="1800" b="1" i="0" kern="1200" dirty="0" smtClean="0">
+                          <a:solidFill>
+                            <a:schemeClr val="dk1"/>
+                          </a:solidFill>
+                          <a:effectLst/>
+                          <a:latin typeface="+mn-lt"/>
+                          <a:ea typeface="+mn-ea"/>
+                          <a:cs typeface="+mn-cs"/>
+                        </a:rPr>
+                        <a:t>An Efficient and Non-Intrusive GPU Scheduling Framework for Deep Learning Training Systems 2020</a:t>
+                      </a:r>
+                    </a:p>
+                    <a:p>
+                      <a:endParaRPr lang="zh-CN" altLang="en-US" dirty="0"/>
+                    </a:p>
+                  </a:txBody>
+                  <a:tcPr/>
+                </a:tc>
+                <a:tc>
+                  <a:txBody>
+                    <a:bodyPr/>
+                    <a:lstStyle/>
+                    <a:p>
+                      <a:r>
+                        <a:rPr lang="zh-CN" altLang="en-US" dirty="0" smtClean="0"/>
+                        <a:t>调度框架可以不终止工作</a:t>
+                      </a:r>
+                      <a:r>
+                        <a:rPr lang="en-US" altLang="zh-CN" dirty="0" smtClean="0"/>
+                        <a:t>,</a:t>
+                      </a:r>
+                      <a:r>
+                        <a:rPr lang="zh-CN" altLang="en-US" dirty="0" smtClean="0"/>
+                        <a:t>包括一个弹性的 </a:t>
+                      </a:r>
+                      <a:r>
+                        <a:rPr lang="en-US" altLang="zh-CN" dirty="0" smtClean="0"/>
+                        <a:t>GPU </a:t>
+                      </a:r>
+                      <a:r>
+                        <a:rPr lang="zh-CN" altLang="en-US" dirty="0" smtClean="0"/>
+                        <a:t>分配机制，以进一步减少</a:t>
+                      </a:r>
+                      <a:r>
+                        <a:rPr lang="en-US" altLang="zh-CN" dirty="0" smtClean="0"/>
+                        <a:t>reshape</a:t>
+                      </a:r>
+                      <a:r>
+                        <a:rPr lang="zh-CN" altLang="en-US" dirty="0" smtClean="0"/>
+                        <a:t>的开销</a:t>
+                      </a:r>
+                      <a:endParaRPr lang="zh-CN" altLang="en-US" dirty="0"/>
+                    </a:p>
+                  </a:txBody>
+                  <a:tcPr/>
+                </a:tc>
+                <a:tc>
+                  <a:txBody>
+                    <a:bodyPr/>
+                    <a:lstStyle/>
+                    <a:p>
+                      <a:r>
+                        <a:rPr lang="zh-CN" altLang="en-US" sz="1800" b="0" i="0" kern="1200" dirty="0" smtClean="0">
+                          <a:solidFill>
+                            <a:schemeClr val="dk1"/>
+                          </a:solidFill>
+                          <a:effectLst/>
+                          <a:latin typeface="+mn-lt"/>
+                          <a:ea typeface="+mn-ea"/>
+                          <a:cs typeface="+mn-cs"/>
+                        </a:rPr>
+                        <a:t>输入进度信息为传入和运行作业的 </a:t>
+                      </a:r>
+                      <a:r>
+                        <a:rPr lang="en-US" altLang="zh-CN" sz="1800" b="0" i="0" kern="1200" dirty="0" smtClean="0">
+                          <a:solidFill>
+                            <a:schemeClr val="dk1"/>
+                          </a:solidFill>
+                          <a:effectLst/>
+                          <a:latin typeface="+mn-lt"/>
+                          <a:ea typeface="+mn-ea"/>
+                          <a:cs typeface="+mn-cs"/>
+                        </a:rPr>
+                        <a:t>GPU </a:t>
+                      </a:r>
+                      <a:r>
+                        <a:rPr lang="zh-CN" altLang="en-US" sz="1800" b="0" i="0" kern="1200" dirty="0" smtClean="0">
+                          <a:solidFill>
+                            <a:schemeClr val="dk1"/>
+                          </a:solidFill>
+                          <a:effectLst/>
+                          <a:latin typeface="+mn-lt"/>
+                          <a:ea typeface="+mn-ea"/>
+                          <a:cs typeface="+mn-cs"/>
+                        </a:rPr>
+                        <a:t>最有效分配和重新分配</a:t>
+                      </a:r>
+                      <a:r>
+                        <a:rPr lang="en-US" altLang="zh-CN" sz="1800" b="0" i="0" kern="1200" dirty="0" smtClean="0">
+                          <a:solidFill>
+                            <a:schemeClr val="dk1"/>
+                          </a:solidFill>
+                          <a:effectLst/>
+                          <a:latin typeface="+mn-lt"/>
+                          <a:ea typeface="+mn-ea"/>
+                          <a:cs typeface="+mn-cs"/>
+                        </a:rPr>
+                        <a:t>.</a:t>
+                      </a:r>
+                      <a:r>
+                        <a:rPr lang="zh-CN" altLang="en-US" sz="1800" b="0" i="0" kern="1200" dirty="0" smtClean="0">
+                          <a:solidFill>
+                            <a:schemeClr val="dk1"/>
+                          </a:solidFill>
+                          <a:effectLst/>
+                          <a:latin typeface="+mn-lt"/>
+                          <a:ea typeface="+mn-ea"/>
+                          <a:cs typeface="+mn-cs"/>
+                        </a:rPr>
+                        <a:t>输入输出和我们设计是一样的</a:t>
+                      </a:r>
+                      <a:r>
+                        <a:rPr lang="en-US" altLang="zh-CN" sz="1800" b="0" i="0" kern="1200" dirty="0" smtClean="0">
+                          <a:solidFill>
+                            <a:schemeClr val="dk1"/>
+                          </a:solidFill>
+                          <a:effectLst/>
+                          <a:latin typeface="+mn-lt"/>
+                          <a:ea typeface="+mn-ea"/>
+                          <a:cs typeface="+mn-cs"/>
+                        </a:rPr>
+                        <a:t>. </a:t>
+                      </a:r>
+                      <a:r>
+                        <a:rPr lang="zh-CN" altLang="en-US" sz="1800" b="0" i="0" kern="1200" dirty="0" smtClean="0">
+                          <a:solidFill>
+                            <a:schemeClr val="dk1"/>
+                          </a:solidFill>
+                          <a:effectLst/>
+                          <a:latin typeface="+mn-lt"/>
+                          <a:ea typeface="+mn-ea"/>
+                          <a:cs typeface="+mn-cs"/>
+                        </a:rPr>
+                        <a:t>我们也可以做</a:t>
+                      </a:r>
+                      <a:r>
+                        <a:rPr lang="en-US" altLang="zh-CN" dirty="0" smtClean="0"/>
+                        <a:t>non-intrusive</a:t>
+                      </a:r>
+                      <a:r>
+                        <a:rPr lang="zh-CN" altLang="en-US" dirty="0" smtClean="0"/>
+                        <a:t>的调度</a:t>
+                      </a:r>
+                      <a:endParaRPr lang="zh-CN" altLang="en-US" dirty="0"/>
+                    </a:p>
+                  </a:txBody>
+                  <a:tcPr/>
+                </a:tc>
+                <a:extLst>
+                  <a:ext uri="{0D108BD9-81ED-4DB2-BD59-A6C34878D82A}">
+                    <a16:rowId xmlns:a16="http://schemas.microsoft.com/office/drawing/2014/main" val="3638627462"/>
                   </a:ext>
                 </a:extLst>
               </a:tr>
@@ -16876,14 +17662,14 @@
           <p:nvPr>
             <p:extLst>
               <p:ext uri="{D42A27DB-BD31-4B8C-83A1-F6EECF244321}">
-                <p14:modId xmlns:p14="http://schemas.microsoft.com/office/powerpoint/2010/main" val="4036305913"/>
+                <p14:modId xmlns:p14="http://schemas.microsoft.com/office/powerpoint/2010/main" val="2573266900"/>
               </p:ext>
             </p:extLst>
           </p:nvPr>
         </p:nvGraphicFramePr>
         <p:xfrm>
-          <a:off x="838200" y="1752598"/>
-          <a:ext cx="9398001" cy="2530080"/>
+          <a:off x="114299" y="1473198"/>
+          <a:ext cx="11925300" cy="4380578"/>
         </p:xfrm>
         <a:graphic>
           <a:graphicData uri="http://schemas.openxmlformats.org/drawingml/2006/table">
@@ -16892,21 +17678,21 @@
                 <a:tableStyleId>{5C22544A-7EE6-4342-B048-85BDC9FD1C3A}</a:tableStyleId>
               </a:tblPr>
               <a:tblGrid>
-                <a:gridCol w="3132667">
+                <a:gridCol w="3975100">
                   <a:extLst>
                     <a:ext uri="{9D8B030D-6E8A-4147-A177-3AD203B41FA5}">
                       <a16:colId xmlns:a16="http://schemas.microsoft.com/office/drawing/2014/main" val="2104862403"/>
                     </a:ext>
                   </a:extLst>
                 </a:gridCol>
-                <a:gridCol w="3132667">
+                <a:gridCol w="3975100">
                   <a:extLst>
                     <a:ext uri="{9D8B030D-6E8A-4147-A177-3AD203B41FA5}">
                       <a16:colId xmlns:a16="http://schemas.microsoft.com/office/drawing/2014/main" val="3631488225"/>
                     </a:ext>
                   </a:extLst>
                 </a:gridCol>
-                <a:gridCol w="3132667">
+                <a:gridCol w="3975100">
                   <a:extLst>
                     <a:ext uri="{9D8B030D-6E8A-4147-A177-3AD203B41FA5}">
                       <a16:colId xmlns:a16="http://schemas.microsoft.com/office/drawing/2014/main" val="1593399558"/>
@@ -16914,7 +17700,7 @@
                   </a:extLst>
                 </a:gridCol>
               </a:tblGrid>
-              <a:tr h="630000">
+              <a:tr h="693882">
                 <a:tc>
                   <a:txBody>
                     <a:bodyPr/>
@@ -16946,7 +17732,7 @@
                     <a:p>
                       <a:r>
                         <a:rPr lang="zh-CN" altLang="en-US" dirty="0" smtClean="0"/>
-                        <a:t>是否可以用在我们的设计</a:t>
+                        <a:t>和我们的关系 </a:t>
                       </a:r>
                       <a:endParaRPr lang="zh-CN" altLang="en-US" dirty="0"/>
                     </a:p>
@@ -16959,7 +17745,7 @@
                   </a:ext>
                 </a:extLst>
               </a:tr>
-              <a:tr h="630000">
+              <a:tr h="693882">
                 <a:tc>
                   <a:txBody>
                     <a:bodyPr/>
@@ -16975,7 +17761,7 @@
                           <a:ea typeface="+mn-ea"/>
                           <a:cs typeface="+mn-cs"/>
                         </a:rPr>
-                        <a:t>Spotlight</a:t>
+                        <a:t>Spotlight: Optimizing Device Placement for Training Deep Neural Networks 2018</a:t>
                       </a:r>
                       <a:endParaRPr lang="en-US" altLang="zh-CN" sz="1800" b="1" i="0" kern="1200" dirty="0">
                         <a:solidFill>
@@ -17196,12 +17982,86 @@
                   </a:ext>
                 </a:extLst>
               </a:tr>
-              <a:tr h="630000">
+              <a:tr h="1309256">
                 <a:tc>
                   <a:txBody>
                     <a:bodyPr/>
                     <a:lstStyle/>
                     <a:p>
+                      <a:pPr marL="0" marR="0" indent="0" algn="l" defTabSz="914400" rtl="0" eaLnBrk="1" fontAlgn="auto" latinLnBrk="0" hangingPunct="1">
+                        <a:lnSpc>
+                          <a:spcPct val="100000"/>
+                        </a:lnSpc>
+                        <a:spcBef>
+                          <a:spcPts val="0"/>
+                        </a:spcBef>
+                        <a:spcAft>
+                          <a:spcPts val="0"/>
+                        </a:spcAft>
+                        <a:buClrTx/>
+                        <a:buSzTx/>
+                        <a:buFontTx/>
+                        <a:buNone/>
+                        <a:tabLst/>
+                        <a:defRPr/>
+                      </a:pPr>
+                      <a:r>
+                        <a:rPr lang="en-US" altLang="zh-CN" sz="1800" b="1" i="0" kern="1200" dirty="0" smtClean="0">
+                          <a:solidFill>
+                            <a:schemeClr val="dk1"/>
+                          </a:solidFill>
+                          <a:effectLst/>
+                          <a:latin typeface="+mn-lt"/>
+                          <a:ea typeface="+mn-ea"/>
+                          <a:cs typeface="+mn-cs"/>
+                        </a:rPr>
+                        <a:t>Heterogeneity-Aware Cluster Scheduling Policies for Deep Learning Workloads osdiNov2020</a:t>
+                      </a:r>
+                    </a:p>
+                  </a:txBody>
+                  <a:tcPr/>
+                </a:tc>
+                <a:tc>
+                  <a:txBody>
+                    <a:bodyPr/>
+                    <a:lstStyle/>
+                    <a:p>
+                      <a:r>
+                        <a:rPr lang="zh-CN" altLang="en-US" sz="1800" b="0" i="0" kern="1200" dirty="0" smtClean="0">
+                          <a:solidFill>
+                            <a:schemeClr val="dk1"/>
+                          </a:solidFill>
+                          <a:effectLst/>
+                          <a:latin typeface="+mn-lt"/>
+                          <a:ea typeface="+mn-ea"/>
+                          <a:cs typeface="+mn-cs"/>
+                        </a:rPr>
+                        <a:t>将现有集群调度策略转换为考虑异质性和</a:t>
+                      </a:r>
+                      <a:r>
+                        <a:rPr lang="en-US" altLang="zh-CN" sz="1800" b="0" i="0" kern="1200" dirty="0" smtClean="0">
+                          <a:solidFill>
+                            <a:schemeClr val="dk1"/>
+                          </a:solidFill>
+                          <a:effectLst/>
+                          <a:latin typeface="+mn-lt"/>
+                          <a:ea typeface="+mn-ea"/>
+                          <a:cs typeface="+mn-cs"/>
+                        </a:rPr>
+                        <a:t>colocation</a:t>
+                      </a:r>
+                      <a:r>
+                        <a:rPr lang="zh-CN" altLang="en-US" sz="1800" b="0" i="0" kern="1200" dirty="0" smtClean="0">
+                          <a:solidFill>
+                            <a:schemeClr val="dk1"/>
+                          </a:solidFill>
+                          <a:effectLst/>
+                          <a:latin typeface="+mn-lt"/>
+                          <a:ea typeface="+mn-ea"/>
+                          <a:cs typeface="+mn-cs"/>
+                        </a:rPr>
+                        <a:t>的等效策略的系统方法</a:t>
+                      </a:r>
                       <a:endParaRPr lang="zh-CN" altLang="en-US" dirty="0"/>
                     </a:p>
                   </a:txBody>
@@ -17212,16 +18072,130 @@
                     <a:bodyPr/>
                     <a:lstStyle/>
                     <a:p>
-                      <a:endParaRPr lang="zh-CN" altLang="en-US" dirty="0"/>
-                    </a:p>
-                  </a:txBody>
-                  <a:tcPr/>
-                </a:tc>
-                <a:tc>
-                  <a:txBody>
-                    <a:bodyPr/>
-                    <a:lstStyle/>
-                    <a:p>
+                      <a:r>
+                        <a:rPr lang="zh-CN" altLang="en-US" dirty="0" smtClean="0"/>
+                        <a:t>输入</a:t>
+                      </a:r>
+                      <a:r>
+                        <a:rPr lang="en-US" altLang="zh-CN" dirty="0" smtClean="0"/>
+                        <a:t>worker</a:t>
+                      </a:r>
+                      <a:r>
+                        <a:rPr lang="zh-CN" altLang="en-US" dirty="0" smtClean="0"/>
+                        <a:t>和</a:t>
+                      </a:r>
+                      <a:r>
+                        <a:rPr lang="en-US" altLang="zh-CN" dirty="0" smtClean="0"/>
+                        <a:t>active job.</a:t>
+                      </a:r>
+                      <a:r>
+                        <a:rPr lang="zh-CN" altLang="en-US" sz="1800" b="0" i="0" kern="1200" baseline="0" dirty="0" smtClean="0">
+                          <a:solidFill>
+                            <a:schemeClr val="dk1"/>
+                          </a:solidFill>
+                          <a:effectLst/>
+                          <a:latin typeface="+mn-lt"/>
+                          <a:ea typeface="+mn-ea"/>
+                          <a:cs typeface="+mn-cs"/>
+                        </a:rPr>
+                        <a:t> </a:t>
+                      </a:r>
+                      <a:r>
+                        <a:rPr lang="zh-CN" altLang="en-US" sz="1800" b="0" i="0" kern="1200" dirty="0" smtClean="0">
+                          <a:solidFill>
+                            <a:schemeClr val="dk1"/>
+                          </a:solidFill>
+                          <a:effectLst/>
+                          <a:latin typeface="+mn-lt"/>
+                          <a:ea typeface="+mn-ea"/>
+                          <a:cs typeface="+mn-cs"/>
+                        </a:rPr>
+                        <a:t>这可以作为一个</a:t>
+                      </a:r>
+                      <a:r>
+                        <a:rPr lang="en-US" altLang="zh-CN" sz="1800" b="0" i="0" kern="1200" dirty="0" smtClean="0">
+                          <a:solidFill>
+                            <a:schemeClr val="dk1"/>
+                          </a:solidFill>
+                          <a:effectLst/>
+                          <a:latin typeface="+mn-lt"/>
+                          <a:ea typeface="+mn-ea"/>
+                          <a:cs typeface="+mn-cs"/>
+                        </a:rPr>
+                        <a:t>baseline </a:t>
+                      </a:r>
+                      <a:r>
+                        <a:rPr lang="zh-CN" altLang="en-US" sz="1800" b="0" i="0" kern="1200" dirty="0" smtClean="0">
+                          <a:solidFill>
+                            <a:schemeClr val="dk1"/>
+                          </a:solidFill>
+                          <a:effectLst/>
+                          <a:latin typeface="+mn-lt"/>
+                          <a:ea typeface="+mn-ea"/>
+                          <a:cs typeface="+mn-cs"/>
+                        </a:rPr>
+                        <a:t>或者是让设备放置网络先收敛到这个指定的策略</a:t>
+                      </a:r>
+                      <a:r>
+                        <a:rPr lang="en-US" altLang="zh-CN" sz="1800" b="0" i="0" kern="1200" dirty="0" smtClean="0">
+                          <a:solidFill>
+                            <a:schemeClr val="dk1"/>
+                          </a:solidFill>
+                          <a:effectLst/>
+                          <a:latin typeface="+mn-lt"/>
+                          <a:ea typeface="+mn-ea"/>
+                          <a:cs typeface="+mn-cs"/>
+                        </a:rPr>
+                        <a:t>. Or </a:t>
+                      </a:r>
+                      <a:r>
+                        <a:rPr lang="zh-CN" altLang="en-US" sz="1800" b="0" i="0" kern="1200" dirty="0" smtClean="0">
+                          <a:solidFill>
+                            <a:schemeClr val="dk1"/>
+                          </a:solidFill>
+                          <a:effectLst/>
+                          <a:latin typeface="+mn-lt"/>
+                          <a:ea typeface="+mn-ea"/>
+                          <a:cs typeface="+mn-cs"/>
+                        </a:rPr>
+                        <a:t>可以把这个作为第二层</a:t>
+                      </a:r>
+                      <a:r>
+                        <a:rPr lang="en-US" altLang="zh-CN" sz="1800" b="0" i="0" kern="1200" dirty="0" smtClean="0">
+                          <a:solidFill>
+                            <a:schemeClr val="dk1"/>
+                          </a:solidFill>
+                          <a:effectLst/>
+                          <a:latin typeface="+mn-lt"/>
+                          <a:ea typeface="+mn-ea"/>
+                          <a:cs typeface="+mn-cs"/>
+                        </a:rPr>
+                        <a:t>.</a:t>
+                      </a:r>
+                      <a:r>
+                        <a:rPr lang="zh-CN" altLang="en-US" sz="1800" b="0" i="0" kern="1200" dirty="0" smtClean="0">
+                          <a:solidFill>
+                            <a:schemeClr val="dk1"/>
+                          </a:solidFill>
+                          <a:effectLst/>
+                          <a:latin typeface="+mn-lt"/>
+                          <a:ea typeface="+mn-ea"/>
+                          <a:cs typeface="+mn-cs"/>
+                        </a:rPr>
+                        <a:t>可以参考</a:t>
+                      </a:r>
+                      <a:r>
+                        <a:rPr lang="en-US" altLang="zh-CN" sz="1800" b="0" i="0" kern="1200" smtClean="0">
+                          <a:solidFill>
+                            <a:schemeClr val="dk1"/>
+                          </a:solidFill>
+                          <a:effectLst/>
+                          <a:latin typeface="+mn-lt"/>
+                          <a:ea typeface="+mn-ea"/>
+                          <a:cs typeface="+mn-cs"/>
+                        </a:rPr>
+                        <a:t>feedback </a:t>
+                      </a:r>
                       <a:endParaRPr lang="zh-CN" altLang="en-US" dirty="0"/>
                     </a:p>
                   </a:txBody>
@@ -17233,12 +18207,94 @@
                   </a:ext>
                 </a:extLst>
               </a:tr>
-              <a:tr h="630000">
+              <a:tr h="693882">
                 <a:tc>
                   <a:txBody>
                     <a:bodyPr/>
                     <a:lstStyle/>
                     <a:p>
+                      <a:pPr marL="0" marR="0" indent="0" algn="l" defTabSz="914400" rtl="0" eaLnBrk="1" fontAlgn="auto" latinLnBrk="0" hangingPunct="1">
+                        <a:lnSpc>
+                          <a:spcPct val="100000"/>
+                        </a:lnSpc>
+                        <a:spcBef>
+                          <a:spcPts val="0"/>
+                        </a:spcBef>
+                        <a:spcAft>
+                          <a:spcPts val="0"/>
+                        </a:spcAft>
+                        <a:buClrTx/>
+                        <a:buSzTx/>
+                        <a:buFontTx/>
+                        <a:buNone/>
+                        <a:tabLst/>
+                        <a:defRPr/>
+                      </a:pPr>
+                      <a:r>
+                        <a:rPr lang="en-US" altLang="zh-CN" sz="1800" b="1" i="0" kern="1200" dirty="0" smtClean="0">
+                          <a:solidFill>
+                            <a:schemeClr val="dk1"/>
+                          </a:solidFill>
+                          <a:effectLst/>
+                          <a:latin typeface="+mn-lt"/>
+                          <a:ea typeface="+mn-ea"/>
+                          <a:cs typeface="+mn-cs"/>
+                        </a:rPr>
+                        <a:t>Tiresias: A GPU Cluster Manager for Distributed Deep Learning </a:t>
+                      </a:r>
+                      <a:r>
+                        <a:rPr lang="en-US" altLang="zh-CN" sz="1800" b="1" i="0" kern="1200" dirty="0" err="1" smtClean="0">
+                          <a:solidFill>
+                            <a:schemeClr val="dk1"/>
+                          </a:solidFill>
+                          <a:effectLst/>
+                          <a:latin typeface="+mn-lt"/>
+                          <a:ea typeface="+mn-ea"/>
+                          <a:cs typeface="+mn-cs"/>
+                        </a:rPr>
+                        <a:t>nsdi</a:t>
+                      </a:r>
+                      <a:r>
+                        <a:rPr lang="en-US" altLang="zh-CN" sz="1800" b="1" i="0" kern="1200" dirty="0" smtClean="0">
+                          <a:solidFill>
+                            <a:schemeClr val="dk1"/>
+                          </a:solidFill>
+                          <a:effectLst/>
+                          <a:latin typeface="+mn-lt"/>
+                          <a:ea typeface="+mn-ea"/>
+                          <a:cs typeface="+mn-cs"/>
+                        </a:rPr>
+                        <a:t> 2019</a:t>
+                      </a:r>
+                    </a:p>
+                  </a:txBody>
+                  <a:tcPr/>
+                </a:tc>
+                <a:tc>
+                  <a:txBody>
+                    <a:bodyPr/>
+                    <a:lstStyle/>
+                    <a:p>
+                      <a:r>
+                        <a:rPr lang="zh-CN" altLang="en-US" dirty="0" smtClean="0"/>
+                        <a:t>提出了</a:t>
+                      </a:r>
+                      <a:r>
+                        <a:rPr lang="en-US" altLang="zh-CN" dirty="0" smtClean="0"/>
+                        <a:t>GPU </a:t>
+                      </a:r>
+                      <a:r>
+                        <a:rPr lang="zh-CN" altLang="en-US" dirty="0" smtClean="0"/>
+                        <a:t>资源配置和</a:t>
+                      </a:r>
+                      <a:r>
+                        <a:rPr lang="en-US" altLang="zh-CN" dirty="0" err="1" smtClean="0"/>
+                        <a:t>placment</a:t>
+                      </a:r>
+                      <a:r>
+                        <a:rPr lang="zh-CN" altLang="en-US" dirty="0" smtClean="0"/>
+                        <a:t>的方法</a:t>
+                      </a:r>
                       <a:endParaRPr lang="zh-CN" altLang="en-US" dirty="0"/>
                     </a:p>
                   </a:txBody>
@@ -17249,16 +18305,218 @@
                     <a:bodyPr/>
                     <a:lstStyle/>
                     <a:p>
-                      <a:endParaRPr lang="zh-CN" altLang="en-US" dirty="0"/>
-                    </a:p>
-                  </a:txBody>
-                  <a:tcPr/>
-                </a:tc>
-                <a:tc>
-                  <a:txBody>
-                    <a:bodyPr/>
-                    <a:lstStyle/>
-                    <a:p>
+                      <a:r>
+                        <a:rPr lang="zh-CN" altLang="en-US" dirty="0" smtClean="0"/>
+                        <a:t>属于</a:t>
+                      </a:r>
+                      <a:r>
+                        <a:rPr lang="en-US" altLang="zh-CN" dirty="0" err="1" smtClean="0"/>
+                        <a:t>optimus</a:t>
+                      </a:r>
+                      <a:r>
+                        <a:rPr lang="zh-CN" altLang="en-US" dirty="0" smtClean="0"/>
+                        <a:t>的</a:t>
+                      </a:r>
+                      <a:r>
+                        <a:rPr lang="zh-CN" altLang="en-US" dirty="0" smtClean="0"/>
+                        <a:t>优化</a:t>
+                      </a:r>
+                      <a:r>
+                        <a:rPr lang="en-US" altLang="zh-CN" dirty="0" smtClean="0"/>
+                        <a:t>.</a:t>
+                      </a:r>
+                      <a:r>
+                        <a:rPr lang="zh-CN" altLang="en-US" dirty="0" smtClean="0"/>
+                        <a:t> </a:t>
+                      </a:r>
+                      <a:r>
+                        <a:rPr lang="zh-CN" altLang="en-US" dirty="0" smtClean="0"/>
+                        <a:t>它没有</a:t>
+                      </a:r>
+                      <a:r>
+                        <a:rPr lang="zh-CN" altLang="en-US" dirty="0" smtClean="0"/>
+                        <a:t>考虑</a:t>
+                      </a:r>
+                      <a:r>
+                        <a:rPr lang="en-US" altLang="zh-CN" dirty="0" smtClean="0"/>
+                        <a:t>job</a:t>
+                      </a:r>
+                      <a:r>
+                        <a:rPr lang="zh-CN" altLang="en-US" dirty="0" smtClean="0"/>
+                        <a:t>适合哪种</a:t>
+                      </a:r>
+                      <a:r>
+                        <a:rPr lang="en-US" altLang="zh-CN" dirty="0" smtClean="0"/>
+                        <a:t>device, </a:t>
+                      </a:r>
+                      <a:r>
+                        <a:rPr lang="zh-CN" altLang="en-US" sz="1800" b="0" i="0" kern="1200" dirty="0" smtClean="0">
+                          <a:solidFill>
+                            <a:schemeClr val="dk1"/>
+                          </a:solidFill>
+                          <a:effectLst/>
+                          <a:latin typeface="+mn-lt"/>
+                          <a:ea typeface="+mn-ea"/>
+                          <a:cs typeface="+mn-cs"/>
+                        </a:rPr>
+                        <a:t>调度机制和</a:t>
+                      </a:r>
+                      <a:r>
+                        <a:rPr lang="en-US" altLang="zh-CN" sz="1800" b="0" i="0" kern="1200" dirty="0" smtClean="0">
+                          <a:solidFill>
+                            <a:schemeClr val="dk1"/>
+                          </a:solidFill>
+                          <a:effectLst/>
+                          <a:latin typeface="+mn-lt"/>
+                          <a:ea typeface="+mn-ea"/>
+                          <a:cs typeface="+mn-cs"/>
+                        </a:rPr>
+                        <a:t>target policy </a:t>
+                      </a:r>
+                      <a:r>
+                        <a:rPr lang="zh-CN" altLang="en-US" sz="1800" b="0" i="0" kern="1200" dirty="0" smtClean="0">
+                          <a:solidFill>
+                            <a:schemeClr val="dk1"/>
+                          </a:solidFill>
+                          <a:effectLst/>
+                          <a:latin typeface="+mn-lt"/>
+                          <a:ea typeface="+mn-ea"/>
+                          <a:cs typeface="+mn-cs"/>
+                        </a:rPr>
+                        <a:t>强耦合</a:t>
+                      </a:r>
+                      <a:r>
+                        <a:rPr lang="en-US" altLang="zh-CN" sz="1800" b="0" i="0" kern="1200" dirty="0" smtClean="0">
+                          <a:solidFill>
+                            <a:schemeClr val="dk1"/>
+                          </a:solidFill>
+                          <a:effectLst/>
+                          <a:latin typeface="+mn-lt"/>
+                          <a:ea typeface="+mn-ea"/>
+                          <a:cs typeface="+mn-cs"/>
+                        </a:rPr>
+                        <a:t>, </a:t>
+                      </a:r>
+                      <a:r>
+                        <a:rPr lang="zh-CN" altLang="en-US" sz="1800" b="0" i="0" kern="1200" dirty="0" smtClean="0">
+                          <a:solidFill>
+                            <a:schemeClr val="dk1"/>
+                          </a:solidFill>
+                          <a:effectLst/>
+                          <a:latin typeface="+mn-lt"/>
+                          <a:ea typeface="+mn-ea"/>
+                          <a:cs typeface="+mn-cs"/>
+                        </a:rPr>
+                        <a:t>很难支持其他更复杂的策略</a:t>
+                      </a:r>
+                      <a:r>
+                        <a:rPr lang="en-US" altLang="zh-CN" sz="1800" b="0" i="0" kern="1200" dirty="0" smtClean="0">
+                          <a:solidFill>
+                            <a:schemeClr val="dk1"/>
+                          </a:solidFill>
+                          <a:effectLst/>
+                          <a:latin typeface="+mn-lt"/>
+                          <a:ea typeface="+mn-ea"/>
+                          <a:cs typeface="+mn-cs"/>
+                        </a:rPr>
+                        <a:t>. </a:t>
+                      </a:r>
+                      <a:r>
+                        <a:rPr lang="zh-CN" altLang="en-US" sz="1800" b="0" i="0" kern="1200" dirty="0" smtClean="0">
+                          <a:solidFill>
+                            <a:schemeClr val="dk1"/>
+                          </a:solidFill>
+                          <a:effectLst/>
+                          <a:latin typeface="+mn-lt"/>
+                          <a:ea typeface="+mn-ea"/>
+                          <a:cs typeface="+mn-cs"/>
+                        </a:rPr>
+                        <a:t>而且要求用户提交</a:t>
+                      </a:r>
+                      <a:r>
+                        <a:rPr lang="en-US" altLang="zh-CN" sz="1800" b="0" i="0" kern="1200" dirty="0" smtClean="0">
+                          <a:solidFill>
+                            <a:schemeClr val="dk1"/>
+                          </a:solidFill>
+                          <a:effectLst/>
+                          <a:latin typeface="+mn-lt"/>
+                          <a:ea typeface="+mn-ea"/>
+                          <a:cs typeface="+mn-cs"/>
+                        </a:rPr>
+                        <a:t>GPU</a:t>
+                      </a:r>
+                      <a:r>
+                        <a:rPr lang="zh-CN" altLang="en-US" sz="1800" b="0" i="0" kern="1200" dirty="0" smtClean="0">
+                          <a:solidFill>
+                            <a:schemeClr val="dk1"/>
+                          </a:solidFill>
+                          <a:effectLst/>
+                          <a:latin typeface="+mn-lt"/>
+                          <a:ea typeface="+mn-ea"/>
+                          <a:cs typeface="+mn-cs"/>
+                        </a:rPr>
+                        <a:t>数量</a:t>
+                      </a:r>
+                      <a:r>
+                        <a:rPr lang="en-US" altLang="zh-CN" sz="1800" b="0" i="0" kern="1200" dirty="0" smtClean="0">
+                          <a:solidFill>
+                            <a:schemeClr val="dk1"/>
+                          </a:solidFill>
+                          <a:effectLst/>
+                          <a:latin typeface="+mn-lt"/>
+                          <a:ea typeface="+mn-ea"/>
+                          <a:cs typeface="+mn-cs"/>
+                        </a:rPr>
+                        <a:t>, </a:t>
+                      </a:r>
+                      <a:r>
+                        <a:rPr lang="zh-CN" altLang="en-US" sz="1800" b="0" i="0" kern="1200" dirty="0" smtClean="0">
+                          <a:solidFill>
+                            <a:schemeClr val="dk1"/>
+                          </a:solidFill>
+                          <a:effectLst/>
+                          <a:latin typeface="+mn-lt"/>
+                          <a:ea typeface="+mn-ea"/>
+                          <a:cs typeface="+mn-cs"/>
+                        </a:rPr>
+                        <a:t>属于</a:t>
+                      </a:r>
+                      <a:r>
+                        <a:rPr lang="en-US" altLang="zh-CN" sz="1800" b="0" i="0" kern="1200" dirty="0" smtClean="0">
+                          <a:solidFill>
+                            <a:schemeClr val="dk1"/>
+                          </a:solidFill>
+                          <a:effectLst/>
+                          <a:latin typeface="+mn-lt"/>
+                          <a:ea typeface="+mn-ea"/>
+                          <a:cs typeface="+mn-cs"/>
+                        </a:rPr>
+                        <a:t>non-scale-adaptive</a:t>
+                      </a:r>
+                      <a:r>
+                        <a:rPr lang="zh-CN" altLang="en-US" sz="1800" b="0" i="0" kern="1200" dirty="0" smtClean="0">
+                          <a:solidFill>
+                            <a:schemeClr val="dk1"/>
+                          </a:solidFill>
+                          <a:effectLst/>
+                          <a:latin typeface="+mn-lt"/>
+                          <a:ea typeface="+mn-ea"/>
+                          <a:cs typeface="+mn-cs"/>
+                        </a:rPr>
+                        <a:t>调度</a:t>
+                      </a:r>
+                      <a:r>
+                        <a:rPr lang="en-US" altLang="zh-CN" sz="1800" b="0" i="0" kern="1200" dirty="0" smtClean="0">
+                          <a:solidFill>
+                            <a:schemeClr val="dk1"/>
+                          </a:solidFill>
+                          <a:effectLst/>
+                          <a:latin typeface="+mn-lt"/>
+                          <a:ea typeface="+mn-ea"/>
+                          <a:cs typeface="+mn-cs"/>
+                        </a:rPr>
+                        <a:t>.</a:t>
+                      </a:r>
                       <a:endParaRPr lang="zh-CN" altLang="en-US" dirty="0"/>
                     </a:p>
                   </a:txBody>
@@ -17277,7 +18535,7 @@
     </p:spTree>
     <p:extLst>
       <p:ext uri="{BB962C8B-B14F-4D97-AF65-F5344CB8AC3E}">
-        <p14:creationId xmlns:p14="http://schemas.microsoft.com/office/powerpoint/2010/main" val="2043460487"/>
+        <p14:creationId xmlns:p14="http://schemas.microsoft.com/office/powerpoint/2010/main" val="3981891420"/>
       </p:ext>
     </p:extLst>
   </p:cSld>
@@ -17288,6 +18546,676 @@
 </file>
 
 <file path=ppt/slides/slide5.xml><?xml version="1.0" encoding="utf-8"?>
+<p:sld xmlns:a="http://schemas.openxmlformats.org/drawingml/2006/main" xmlns:r="http://schemas.openxmlformats.org/officeDocument/2006/relationships" xmlns:p="http://schemas.openxmlformats.org/presentationml/2006/main">
+  <p:cSld>
+    <p:spTree>
+      <p:nvGrpSpPr>
+        <p:cNvPr id="1" name=""/>
+        <p:cNvGrpSpPr/>
+        <p:nvPr/>
+      </p:nvGrpSpPr>
+      <p:grpSpPr>
+        <a:xfrm>
+          <a:off x="0" y="0"/>
+          <a:ext cx="0" cy="0"/>
+          <a:chOff x="0" y="0"/>
+          <a:chExt cx="0" cy="0"/>
+        </a:xfrm>
+      </p:grpSpPr>
+      <p:sp>
+        <p:nvSpPr>
+          <p:cNvPr id="2" name="标题 1"/>
+          <p:cNvSpPr>
+            <a:spLocks noGrp="1"/>
+          </p:cNvSpPr>
+          <p:nvPr>
+            <p:ph type="title"/>
+          </p:nvPr>
+        </p:nvSpPr>
+        <p:spPr/>
+        <p:txBody>
+          <a:bodyPr/>
+          <a:lstStyle/>
+          <a:p>
+            <a:r>
+              <a:rPr lang="zh-CN" altLang="en-US" dirty="0" smtClean="0"/>
+              <a:t>利用</a:t>
+            </a:r>
+            <a:r>
+              <a:rPr lang="en-US" altLang="zh-CN" dirty="0" smtClean="0"/>
+              <a:t>DRL</a:t>
+            </a:r>
+            <a:r>
+              <a:rPr lang="zh-CN" altLang="en-US" dirty="0" smtClean="0"/>
+              <a:t>作为</a:t>
+            </a:r>
+            <a:r>
+              <a:rPr lang="en-US" altLang="zh-CN" dirty="0" smtClean="0"/>
+              <a:t>policy allocation</a:t>
+            </a:r>
+            <a:endParaRPr lang="zh-CN" altLang="en-US" dirty="0"/>
+          </a:p>
+        </p:txBody>
+      </p:sp>
+      <p:pic>
+        <p:nvPicPr>
+          <p:cNvPr id="3" name="图片 2"/>
+          <p:cNvPicPr>
+            <a:picLocks noChangeAspect="1"/>
+          </p:cNvPicPr>
+          <p:nvPr/>
+        </p:nvPicPr>
+        <p:blipFill>
+          <a:blip r:embed="rId3"/>
+          <a:stretch>
+            <a:fillRect/>
+          </a:stretch>
+        </p:blipFill>
+        <p:spPr>
+          <a:xfrm>
+            <a:off x="838200" y="2100262"/>
+            <a:ext cx="11018838" cy="2330673"/>
+          </a:xfrm>
+          <a:prstGeom prst="rect">
+            <a:avLst/>
+          </a:prstGeom>
+        </p:spPr>
+      </p:pic>
+      <p:sp>
+        <p:nvSpPr>
+          <p:cNvPr id="5" name="内容占位符 2"/>
+          <p:cNvSpPr>
+            <a:spLocks noGrp="1"/>
+          </p:cNvSpPr>
+          <p:nvPr>
+            <p:ph idx="1"/>
+          </p:nvPr>
+        </p:nvSpPr>
+        <p:spPr>
+          <a:xfrm>
+            <a:off x="838200" y="4840509"/>
+            <a:ext cx="10515600" cy="518891"/>
+          </a:xfrm>
+        </p:spPr>
+        <p:txBody>
+          <a:bodyPr>
+            <a:normAutofit/>
+          </a:bodyPr>
+          <a:lstStyle/>
+          <a:p>
+            <a:pPr marL="0" lvl="0" indent="0">
+              <a:buNone/>
+            </a:pPr>
+            <a:r>
+              <a:rPr lang="en-US" altLang="zh-CN" dirty="0" smtClean="0"/>
+              <a:t>DRL</a:t>
+            </a:r>
+            <a:r>
+              <a:rPr lang="zh-CN" altLang="en-US" dirty="0" smtClean="0"/>
+              <a:t>训练</a:t>
+            </a:r>
+            <a:r>
+              <a:rPr lang="en-US" altLang="zh-CN" dirty="0" smtClean="0"/>
+              <a:t>policy, </a:t>
+            </a:r>
+            <a:r>
+              <a:rPr lang="zh-CN" altLang="en-US" dirty="0" smtClean="0"/>
+              <a:t>利用</a:t>
+            </a:r>
+            <a:r>
+              <a:rPr lang="en-US" altLang="zh-CN" dirty="0" smtClean="0"/>
+              <a:t>gavel</a:t>
+            </a:r>
+            <a:r>
+              <a:rPr lang="zh-CN" altLang="en-US" dirty="0" smtClean="0"/>
+              <a:t>来</a:t>
+            </a:r>
+            <a:r>
+              <a:rPr lang="en-US" altLang="zh-CN" dirty="0" smtClean="0"/>
+              <a:t>placement.</a:t>
+            </a:r>
+          </a:p>
+          <a:p>
+            <a:pPr marL="0" lvl="0" indent="0">
+              <a:buNone/>
+            </a:pPr>
+            <a:endParaRPr lang="en-US" altLang="zh-CN" dirty="0" smtClean="0"/>
+          </a:p>
+        </p:txBody>
+      </p:sp>
+    </p:spTree>
+    <p:extLst>
+      <p:ext uri="{BB962C8B-B14F-4D97-AF65-F5344CB8AC3E}">
+        <p14:creationId xmlns:p14="http://schemas.microsoft.com/office/powerpoint/2010/main" val="3380757497"/>
+      </p:ext>
+    </p:extLst>
+  </p:cSld>
+  <p:clrMapOvr>
+    <a:masterClrMapping/>
+  </p:clrMapOvr>
+</p:sld>
+</file>
+
+<file path=ppt/slides/slide6.xml><?xml version="1.0" encoding="utf-8"?>
+<p:sld xmlns:a="http://schemas.openxmlformats.org/drawingml/2006/main" xmlns:r="http://schemas.openxmlformats.org/officeDocument/2006/relationships" xmlns:p="http://schemas.openxmlformats.org/presentationml/2006/main">
+  <p:cSld>
+    <p:spTree>
+      <p:nvGrpSpPr>
+        <p:cNvPr id="1" name=""/>
+        <p:cNvGrpSpPr/>
+        <p:nvPr/>
+      </p:nvGrpSpPr>
+      <p:grpSpPr>
+        <a:xfrm>
+          <a:off x="0" y="0"/>
+          <a:ext cx="0" cy="0"/>
+          <a:chOff x="0" y="0"/>
+          <a:chExt cx="0" cy="0"/>
+        </a:xfrm>
+      </p:grpSpPr>
+      <p:graphicFrame>
+        <p:nvGraphicFramePr>
+          <p:cNvPr id="4" name="表格 3"/>
+          <p:cNvGraphicFramePr>
+            <a:graphicFrameLocks noGrp="1"/>
+          </p:cNvGraphicFramePr>
+          <p:nvPr>
+            <p:extLst>
+              <p:ext uri="{D42A27DB-BD31-4B8C-83A1-F6EECF244321}">
+                <p14:modId xmlns:p14="http://schemas.microsoft.com/office/powerpoint/2010/main" val="3377851792"/>
+              </p:ext>
+            </p:extLst>
+          </p:nvPr>
+        </p:nvGraphicFramePr>
+        <p:xfrm>
+          <a:off x="707571" y="1821307"/>
+          <a:ext cx="11042695" cy="3782116"/>
+        </p:xfrm>
+        <a:graphic>
+          <a:graphicData uri="http://schemas.openxmlformats.org/drawingml/2006/table">
+            <a:tbl>
+              <a:tblPr firstRow="1" bandRow="1">
+                <a:tableStyleId>{5C22544A-7EE6-4342-B048-85BDC9FD1C3A}</a:tableStyleId>
+              </a:tblPr>
+              <a:tblGrid>
+                <a:gridCol w="2208539">
+                  <a:extLst>
+                    <a:ext uri="{9D8B030D-6E8A-4147-A177-3AD203B41FA5}">
+                      <a16:colId xmlns:a16="http://schemas.microsoft.com/office/drawing/2014/main" val="2104862403"/>
+                    </a:ext>
+                  </a:extLst>
+                </a:gridCol>
+                <a:gridCol w="2208539">
+                  <a:extLst>
+                    <a:ext uri="{9D8B030D-6E8A-4147-A177-3AD203B41FA5}">
+                      <a16:colId xmlns:a16="http://schemas.microsoft.com/office/drawing/2014/main" val="3631488225"/>
+                    </a:ext>
+                  </a:extLst>
+                </a:gridCol>
+                <a:gridCol w="2208539">
+                  <a:extLst>
+                    <a:ext uri="{9D8B030D-6E8A-4147-A177-3AD203B41FA5}">
+                      <a16:colId xmlns:a16="http://schemas.microsoft.com/office/drawing/2014/main" val="1593399558"/>
+                    </a:ext>
+                  </a:extLst>
+                </a:gridCol>
+                <a:gridCol w="2208539">
+                  <a:extLst>
+                    <a:ext uri="{9D8B030D-6E8A-4147-A177-3AD203B41FA5}">
+                      <a16:colId xmlns:a16="http://schemas.microsoft.com/office/drawing/2014/main" val="3501422813"/>
+                    </a:ext>
+                  </a:extLst>
+                </a:gridCol>
+                <a:gridCol w="2208539">
+                  <a:extLst>
+                    <a:ext uri="{9D8B030D-6E8A-4147-A177-3AD203B41FA5}">
+                      <a16:colId xmlns:a16="http://schemas.microsoft.com/office/drawing/2014/main" val="4053707825"/>
+                    </a:ext>
+                  </a:extLst>
+                </a:gridCol>
+              </a:tblGrid>
+              <a:tr h="941762">
+                <a:tc>
+                  <a:txBody>
+                    <a:bodyPr/>
+                    <a:lstStyle/>
+                    <a:p>
+                      <a:endParaRPr lang="zh-CN" altLang="en-US" dirty="0"/>
+                    </a:p>
+                  </a:txBody>
+                  <a:tcPr/>
+                </a:tc>
+                <a:tc>
+                  <a:txBody>
+                    <a:bodyPr/>
+                    <a:lstStyle/>
+                    <a:p>
+                      <a:r>
+                        <a:rPr lang="en-US" altLang="zh-CN" dirty="0" smtClean="0"/>
+                        <a:t>model</a:t>
+                      </a:r>
+                      <a:endParaRPr lang="zh-CN" altLang="en-US" dirty="0"/>
+                    </a:p>
+                  </a:txBody>
+                  <a:tcPr/>
+                </a:tc>
+                <a:tc>
+                  <a:txBody>
+                    <a:bodyPr/>
+                    <a:lstStyle/>
+                    <a:p>
+                      <a:r>
+                        <a:rPr lang="zh-CN" altLang="en-US" dirty="0" smtClean="0"/>
+                        <a:t>优化</a:t>
+                      </a:r>
+                      <a:endParaRPr lang="zh-CN" altLang="en-US" dirty="0"/>
+                    </a:p>
+                  </a:txBody>
+                  <a:tcPr/>
+                </a:tc>
+                <a:tc>
+                  <a:txBody>
+                    <a:bodyPr/>
+                    <a:lstStyle/>
+                    <a:p>
+                      <a:r>
+                        <a:rPr lang="en-US" altLang="zh-CN" dirty="0" smtClean="0"/>
+                        <a:t>fairness</a:t>
+                      </a:r>
+                      <a:endParaRPr lang="zh-CN" altLang="en-US" dirty="0"/>
+                    </a:p>
+                  </a:txBody>
+                  <a:tcPr/>
+                </a:tc>
+                <a:tc>
+                  <a:txBody>
+                    <a:bodyPr/>
+                    <a:lstStyle/>
+                    <a:p>
+                      <a:r>
+                        <a:rPr lang="zh-CN" altLang="en-US" dirty="0" smtClean="0"/>
+                        <a:t>异构</a:t>
+                      </a:r>
+                      <a:endParaRPr lang="zh-CN" altLang="en-US" dirty="0"/>
+                    </a:p>
+                  </a:txBody>
+                  <a:tcPr/>
+                </a:tc>
+                <a:extLst>
+                  <a:ext uri="{0D108BD9-81ED-4DB2-BD59-A6C34878D82A}">
+                    <a16:rowId xmlns:a16="http://schemas.microsoft.com/office/drawing/2014/main" val="3322635084"/>
+                  </a:ext>
+                </a:extLst>
+              </a:tr>
+              <a:tr h="941762">
+                <a:tc>
+                  <a:txBody>
+                    <a:bodyPr/>
+                    <a:lstStyle/>
+                    <a:p>
+                      <a:r>
+                        <a:rPr lang="en-US" altLang="zh-CN" dirty="0" smtClean="0"/>
+                        <a:t>Optimus</a:t>
+                      </a:r>
+                      <a:endParaRPr lang="zh-CN" altLang="en-US" dirty="0"/>
+                    </a:p>
+                  </a:txBody>
+                  <a:tcPr/>
+                </a:tc>
+                <a:tc>
+                  <a:txBody>
+                    <a:bodyPr/>
+                    <a:lstStyle/>
+                    <a:p>
+                      <a:r>
+                        <a:rPr lang="en-US" altLang="zh-CN" dirty="0" smtClean="0"/>
+                        <a:t>PS</a:t>
+                      </a:r>
+                      <a:endParaRPr lang="zh-CN" altLang="en-US" dirty="0"/>
+                    </a:p>
+                  </a:txBody>
+                  <a:tcPr/>
+                </a:tc>
+                <a:tc>
+                  <a:txBody>
+                    <a:bodyPr/>
+                    <a:lstStyle/>
+                    <a:p>
+                      <a:r>
+                        <a:rPr lang="zh-CN" altLang="en-US" dirty="0" smtClean="0"/>
+                        <a:t>平均完成时间</a:t>
+                      </a:r>
+                      <a:endParaRPr lang="zh-CN" altLang="en-US" dirty="0"/>
+                    </a:p>
+                  </a:txBody>
+                  <a:tcPr/>
+                </a:tc>
+                <a:tc>
+                  <a:txBody>
+                    <a:bodyPr/>
+                    <a:lstStyle/>
+                    <a:p>
+                      <a:r>
+                        <a:rPr lang="en-US" altLang="zh-CN" dirty="0" smtClean="0"/>
+                        <a:t>No</a:t>
+                      </a:r>
+                      <a:endParaRPr lang="zh-CN" altLang="en-US" dirty="0"/>
+                    </a:p>
+                  </a:txBody>
+                  <a:tcPr/>
+                </a:tc>
+                <a:tc>
+                  <a:txBody>
+                    <a:bodyPr/>
+                    <a:lstStyle/>
+                    <a:p>
+                      <a:r>
+                        <a:rPr lang="en-US" altLang="zh-CN" dirty="0" smtClean="0"/>
+                        <a:t>No</a:t>
+                      </a:r>
+                      <a:endParaRPr lang="zh-CN" altLang="en-US" dirty="0"/>
+                    </a:p>
+                  </a:txBody>
+                  <a:tcPr/>
+                </a:tc>
+                <a:extLst>
+                  <a:ext uri="{0D108BD9-81ED-4DB2-BD59-A6C34878D82A}">
+                    <a16:rowId xmlns:a16="http://schemas.microsoft.com/office/drawing/2014/main" val="4110064030"/>
+                  </a:ext>
+                </a:extLst>
+              </a:tr>
+              <a:tr h="956830">
+                <a:tc>
+                  <a:txBody>
+                    <a:bodyPr/>
+                    <a:lstStyle/>
+                    <a:p>
+                      <a:r>
+                        <a:rPr lang="en-US" altLang="zh-CN" dirty="0" smtClean="0"/>
+                        <a:t>Tiresias</a:t>
+                      </a:r>
+                      <a:r>
+                        <a:rPr lang="en-US" altLang="zh-CN" dirty="0" smtClean="0"/>
+                        <a:t>.</a:t>
+                      </a:r>
+                      <a:endParaRPr lang="zh-CN" altLang="en-US" dirty="0"/>
+                    </a:p>
+                  </a:txBody>
+                  <a:tcPr/>
+                </a:tc>
+                <a:tc>
+                  <a:txBody>
+                    <a:bodyPr/>
+                    <a:lstStyle/>
+                    <a:p>
+                      <a:r>
+                        <a:rPr lang="en-US" altLang="zh-CN" dirty="0" smtClean="0"/>
+                        <a:t>PS</a:t>
+                      </a:r>
+                      <a:endParaRPr lang="zh-CN" altLang="en-US" dirty="0"/>
+                    </a:p>
+                  </a:txBody>
+                  <a:tcPr/>
+                </a:tc>
+                <a:tc>
+                  <a:txBody>
+                    <a:bodyPr/>
+                    <a:lstStyle/>
+                    <a:p>
+                      <a:pPr marL="0" marR="0" indent="0" algn="l" defTabSz="914400" rtl="0" eaLnBrk="1" fontAlgn="auto" latinLnBrk="0" hangingPunct="1">
+                        <a:lnSpc>
+                          <a:spcPct val="100000"/>
+                        </a:lnSpc>
+                        <a:spcBef>
+                          <a:spcPts val="0"/>
+                        </a:spcBef>
+                        <a:spcAft>
+                          <a:spcPts val="0"/>
+                        </a:spcAft>
+                        <a:buClrTx/>
+                        <a:buSzTx/>
+                        <a:buFontTx/>
+                        <a:buNone/>
+                        <a:tabLst/>
+                        <a:defRPr/>
+                      </a:pPr>
+                      <a:r>
+                        <a:rPr lang="zh-CN" altLang="en-US" dirty="0" smtClean="0"/>
+                        <a:t>平均完成时间</a:t>
+                      </a:r>
+                    </a:p>
+                    <a:p>
+                      <a:endParaRPr lang="zh-CN" altLang="en-US" dirty="0"/>
+                    </a:p>
+                  </a:txBody>
+                  <a:tcPr/>
+                </a:tc>
+                <a:tc>
+                  <a:txBody>
+                    <a:bodyPr/>
+                    <a:lstStyle/>
+                    <a:p>
+                      <a:r>
+                        <a:rPr lang="en-US" altLang="zh-CN" dirty="0" smtClean="0"/>
+                        <a:t>No</a:t>
+                      </a:r>
+                      <a:endParaRPr lang="zh-CN" altLang="en-US" dirty="0"/>
+                    </a:p>
+                  </a:txBody>
+                  <a:tcPr/>
+                </a:tc>
+                <a:tc>
+                  <a:txBody>
+                    <a:bodyPr/>
+                    <a:lstStyle/>
+                    <a:p>
+                      <a:r>
+                        <a:rPr lang="en-US" altLang="zh-CN" dirty="0" smtClean="0"/>
+                        <a:t>No</a:t>
+                      </a:r>
+                      <a:endParaRPr lang="zh-CN" altLang="en-US" dirty="0"/>
+                    </a:p>
+                  </a:txBody>
+                  <a:tcPr/>
+                </a:tc>
+                <a:extLst>
+                  <a:ext uri="{0D108BD9-81ED-4DB2-BD59-A6C34878D82A}">
+                    <a16:rowId xmlns:a16="http://schemas.microsoft.com/office/drawing/2014/main" val="487215583"/>
+                  </a:ext>
+                </a:extLst>
+              </a:tr>
+              <a:tr h="941762">
+                <a:tc>
+                  <a:txBody>
+                    <a:bodyPr/>
+                    <a:lstStyle/>
+                    <a:p>
+                      <a:r>
+                        <a:rPr lang="en-US" altLang="zh-CN" dirty="0" err="1" smtClean="0"/>
+                        <a:t>Gandiva</a:t>
+                      </a:r>
+                      <a:endParaRPr lang="zh-CN" altLang="en-US" dirty="0"/>
+                    </a:p>
+                  </a:txBody>
+                  <a:tcPr/>
+                </a:tc>
+                <a:tc>
+                  <a:txBody>
+                    <a:bodyPr/>
+                    <a:lstStyle/>
+                    <a:p>
+                      <a:r>
+                        <a:rPr lang="zh-CN" altLang="en-US" dirty="0" smtClean="0"/>
+                        <a:t>通用</a:t>
+                      </a:r>
+                      <a:endParaRPr lang="zh-CN" altLang="en-US" dirty="0"/>
+                    </a:p>
+                  </a:txBody>
+                  <a:tcPr/>
+                </a:tc>
+                <a:tc>
+                  <a:txBody>
+                    <a:bodyPr/>
+                    <a:lstStyle/>
+                    <a:p>
+                      <a:r>
+                        <a:rPr lang="zh-CN" altLang="en-US" dirty="0" smtClean="0"/>
+                        <a:t>利用率</a:t>
+                      </a:r>
+                      <a:endParaRPr lang="zh-CN" altLang="en-US" dirty="0"/>
+                    </a:p>
+                  </a:txBody>
+                  <a:tcPr/>
+                </a:tc>
+                <a:tc>
+                  <a:txBody>
+                    <a:bodyPr/>
+                    <a:lstStyle/>
+                    <a:p>
+                      <a:r>
+                        <a:rPr lang="en-US" altLang="zh-CN" dirty="0" smtClean="0"/>
+                        <a:t>no</a:t>
+                      </a:r>
+                      <a:endParaRPr lang="zh-CN" altLang="en-US" dirty="0"/>
+                    </a:p>
+                  </a:txBody>
+                  <a:tcPr/>
+                </a:tc>
+                <a:tc>
+                  <a:txBody>
+                    <a:bodyPr/>
+                    <a:lstStyle/>
+                    <a:p>
+                      <a:r>
+                        <a:rPr lang="en-US" altLang="zh-CN" dirty="0" smtClean="0"/>
+                        <a:t>no</a:t>
+                      </a:r>
+                      <a:endParaRPr lang="zh-CN" altLang="en-US" dirty="0"/>
+                    </a:p>
+                  </a:txBody>
+                  <a:tcPr/>
+                </a:tc>
+                <a:extLst>
+                  <a:ext uri="{0D108BD9-81ED-4DB2-BD59-A6C34878D82A}">
+                    <a16:rowId xmlns:a16="http://schemas.microsoft.com/office/drawing/2014/main" val="639321669"/>
+                  </a:ext>
+                </a:extLst>
+              </a:tr>
+            </a:tbl>
+          </a:graphicData>
+        </a:graphic>
+      </p:graphicFrame>
+    </p:spTree>
+    <p:extLst>
+      <p:ext uri="{BB962C8B-B14F-4D97-AF65-F5344CB8AC3E}">
+        <p14:creationId xmlns:p14="http://schemas.microsoft.com/office/powerpoint/2010/main" val="3232040626"/>
+      </p:ext>
+    </p:extLst>
+  </p:cSld>
+  <p:clrMapOvr>
+    <a:masterClrMapping/>
+  </p:clrMapOvr>
+</p:sld>
+</file>
+
+<file path=ppt/slides/slide7.xml><?xml version="1.0" encoding="utf-8"?>
+<p:sld xmlns:a="http://schemas.openxmlformats.org/drawingml/2006/main" xmlns:r="http://schemas.openxmlformats.org/officeDocument/2006/relationships" xmlns:p="http://schemas.openxmlformats.org/presentationml/2006/main">
+  <p:cSld>
+    <p:spTree>
+      <p:nvGrpSpPr>
+        <p:cNvPr id="1" name=""/>
+        <p:cNvGrpSpPr/>
+        <p:nvPr/>
+      </p:nvGrpSpPr>
+      <p:grpSpPr>
+        <a:xfrm>
+          <a:off x="0" y="0"/>
+          <a:ext cx="0" cy="0"/>
+          <a:chOff x="0" y="0"/>
+          <a:chExt cx="0" cy="0"/>
+        </a:xfrm>
+      </p:grpSpPr>
+      <p:sp>
+        <p:nvSpPr>
+          <p:cNvPr id="2" name="标题 1"/>
+          <p:cNvSpPr>
+            <a:spLocks noGrp="1"/>
+          </p:cNvSpPr>
+          <p:nvPr>
+            <p:ph type="title"/>
+          </p:nvPr>
+        </p:nvSpPr>
+        <p:spPr/>
+        <p:txBody>
+          <a:bodyPr/>
+          <a:lstStyle/>
+          <a:p>
+            <a:r>
+              <a:rPr lang="zh-CN" altLang="en-US" dirty="0" smtClean="0"/>
+              <a:t>问老师的问题</a:t>
+            </a:r>
+            <a:endParaRPr lang="zh-CN" altLang="en-US" dirty="0"/>
+          </a:p>
+        </p:txBody>
+      </p:sp>
+      <p:sp>
+        <p:nvSpPr>
+          <p:cNvPr id="3" name="内容占位符 2"/>
+          <p:cNvSpPr>
+            <a:spLocks noGrp="1"/>
+          </p:cNvSpPr>
+          <p:nvPr>
+            <p:ph idx="1"/>
+          </p:nvPr>
+        </p:nvSpPr>
+        <p:spPr/>
+        <p:txBody>
+          <a:bodyPr>
+            <a:normAutofit/>
+          </a:bodyPr>
+          <a:lstStyle/>
+          <a:p>
+            <a:pPr marL="0" lvl="0" indent="0">
+              <a:buNone/>
+            </a:pPr>
+            <a:r>
+              <a:rPr lang="zh-CN" altLang="en-US" dirty="0" smtClean="0"/>
+              <a:t>许多问题已经问了</a:t>
+            </a:r>
+            <a:r>
+              <a:rPr lang="en-US" altLang="zh-CN" dirty="0" smtClean="0"/>
+              <a:t> </a:t>
+            </a:r>
+            <a:r>
+              <a:rPr lang="en-US" altLang="zh-CN" dirty="0" err="1"/>
+              <a:t>Z</a:t>
+            </a:r>
+            <a:r>
+              <a:rPr lang="en-US" altLang="zh-CN" dirty="0" err="1" smtClean="0"/>
+              <a:t>iyue</a:t>
+            </a:r>
+            <a:r>
+              <a:rPr lang="en-US" altLang="zh-CN" dirty="0" smtClean="0"/>
+              <a:t> Luo</a:t>
+            </a:r>
+            <a:endParaRPr lang="en-US" altLang="zh-CN" dirty="0" smtClean="0"/>
+          </a:p>
+        </p:txBody>
+      </p:sp>
+    </p:spTree>
+    <p:extLst>
+      <p:ext uri="{BB962C8B-B14F-4D97-AF65-F5344CB8AC3E}">
+        <p14:creationId xmlns:p14="http://schemas.microsoft.com/office/powerpoint/2010/main" val="2405949957"/>
+      </p:ext>
+    </p:extLst>
+  </p:cSld>
+  <p:clrMapOvr>
+    <a:masterClrMapping/>
+  </p:clrMapOvr>
+</p:sld>
+</file>
+
+<file path=ppt/slides/slide8.xml><?xml version="1.0" encoding="utf-8"?>
 <p:sld xmlns:a="http://schemas.openxmlformats.org/drawingml/2006/main" xmlns:r="http://schemas.openxmlformats.org/officeDocument/2006/relationships" xmlns:p="http://schemas.openxmlformats.org/presentationml/2006/main">
   <p:cSld>
     <p:spTree>
@@ -17341,7 +19269,7 @@
           <p:nvPr>
             <p:extLst>
               <p:ext uri="{D42A27DB-BD31-4B8C-83A1-F6EECF244321}">
-                <p14:modId xmlns:p14="http://schemas.microsoft.com/office/powerpoint/2010/main" val="3715846641"/>
+                <p14:modId xmlns:p14="http://schemas.microsoft.com/office/powerpoint/2010/main" val="2215933290"/>
               </p:ext>
             </p:extLst>
           </p:nvPr>
@@ -17505,11 +19433,31 @@
                       </a:r>
                       <a:r>
                         <a:rPr lang="en-US" altLang="zh-CN" dirty="0" smtClean="0"/>
-                        <a:t>2 reward</a:t>
+                        <a:t>2</a:t>
                       </a:r>
                       <a:r>
                         <a:rPr lang="zh-CN" altLang="en-US" dirty="0" smtClean="0"/>
-                        <a:t>求偏导的具体实现</a:t>
+                        <a:t>怎么设计一个</a:t>
+                      </a:r>
+                      <a:r>
+                        <a:rPr lang="en-US" altLang="zh-CN" dirty="0" smtClean="0"/>
+                        <a:t>function</a:t>
+                      </a:r>
+                      <a:r>
+                        <a:rPr lang="zh-CN" altLang="en-US" dirty="0" smtClean="0"/>
+                        <a:t>作为</a:t>
+                      </a:r>
+                      <a:r>
+                        <a:rPr lang="en-US" altLang="zh-CN" dirty="0" err="1" smtClean="0"/>
+                        <a:t>drl</a:t>
+                      </a:r>
+                      <a:r>
+                        <a:rPr lang="zh-CN" altLang="en-US" dirty="0" smtClean="0"/>
+                        <a:t>目标可以平衡单个表现和总体表现</a:t>
+                      </a:r>
+                      <a:r>
+                        <a:rPr lang="en-US" altLang="zh-CN" dirty="0" smtClean="0"/>
+                        <a:t>.</a:t>
                       </a:r>
                       <a:endParaRPr lang="zh-CN" altLang="en-US" dirty="0"/>
                     </a:p>
@@ -17522,16 +19470,8 @@
                     <a:lstStyle/>
                     <a:p>
                       <a:r>
-                        <a:rPr lang="zh-CN" altLang="en-US" dirty="0" smtClean="0"/>
-                        <a:t>层次</a:t>
-                      </a:r>
-                      <a:r>
-                        <a:rPr lang="en-US" altLang="zh-CN" dirty="0" smtClean="0"/>
-                        <a:t>reward</a:t>
-                      </a:r>
-                      <a:r>
-                        <a:rPr lang="zh-CN" altLang="en-US" dirty="0" smtClean="0"/>
-                        <a:t>的文献</a:t>
+                        <a:rPr lang="en-US" altLang="zh-CN" dirty="0" err="1" smtClean="0"/>
+                        <a:t>EuroSys</a:t>
                       </a:r>
                       <a:endParaRPr lang="zh-CN" altLang="en-US" dirty="0"/>
                     </a:p>
@@ -17543,10 +19483,6 @@
                     <a:bodyPr/>
                     <a:lstStyle/>
                     <a:p>
-                      <a:r>
-                        <a:rPr lang="zh-CN" altLang="en-US" dirty="0" smtClean="0"/>
-                        <a:t>做了一些策略梯度的实验</a:t>
-                      </a:r>
                       <a:endParaRPr lang="zh-CN" altLang="en-US" dirty="0"/>
                     </a:p>
                   </a:txBody>
@@ -17685,7 +19621,7 @@
 </p:sld>
 </file>
 
-<file path=ppt/slides/slide6.xml><?xml version="1.0" encoding="utf-8"?>
+<file path=ppt/slides/slide9.xml><?xml version="1.0" encoding="utf-8"?>
 <p:sld xmlns:a="http://schemas.openxmlformats.org/drawingml/2006/main" xmlns:r="http://schemas.openxmlformats.org/officeDocument/2006/relationships" xmlns:p="http://schemas.openxmlformats.org/presentationml/2006/main">
   <p:cSld>
     <p:spTree>
@@ -17906,83 +19842,6 @@
     <p:extLst>
       <p:ext uri="{BB962C8B-B14F-4D97-AF65-F5344CB8AC3E}">
         <p14:creationId xmlns:p14="http://schemas.microsoft.com/office/powerpoint/2010/main" val="1674851481"/>
-      </p:ext>
-    </p:extLst>
-  </p:cSld>
-  <p:clrMapOvr>
-    <a:masterClrMapping/>
-  </p:clrMapOvr>
-</p:sld>
-</file>
-
-<file path=ppt/slides/slide7.xml><?xml version="1.0" encoding="utf-8"?>
-<p:sld xmlns:a="http://schemas.openxmlformats.org/drawingml/2006/main" xmlns:r="http://schemas.openxmlformats.org/officeDocument/2006/relationships" xmlns:p="http://schemas.openxmlformats.org/presentationml/2006/main">
-  <p:cSld>
-    <p:spTree>
-      <p:nvGrpSpPr>
-        <p:cNvPr id="1" name=""/>
-        <p:cNvGrpSpPr/>
-        <p:nvPr/>
-      </p:nvGrpSpPr>
-      <p:grpSpPr>
-        <a:xfrm>
-          <a:off x="0" y="0"/>
-          <a:ext cx="0" cy="0"/>
-          <a:chOff x="0" y="0"/>
-          <a:chExt cx="0" cy="0"/>
-        </a:xfrm>
-      </p:grpSpPr>
-      <p:sp>
-        <p:nvSpPr>
-          <p:cNvPr id="2" name="标题 1"/>
-          <p:cNvSpPr>
-            <a:spLocks noGrp="1"/>
-          </p:cNvSpPr>
-          <p:nvPr>
-            <p:ph type="title"/>
-          </p:nvPr>
-        </p:nvSpPr>
-        <p:spPr/>
-        <p:txBody>
-          <a:bodyPr/>
-          <a:lstStyle/>
-          <a:p>
-            <a:r>
-              <a:rPr lang="zh-CN" altLang="en-US" dirty="0" smtClean="0"/>
-              <a:t>问老师的问题</a:t>
-            </a:r>
-            <a:endParaRPr lang="zh-CN" altLang="en-US" dirty="0"/>
-          </a:p>
-        </p:txBody>
-      </p:sp>
-      <p:sp>
-        <p:nvSpPr>
-          <p:cNvPr id="3" name="内容占位符 2"/>
-          <p:cNvSpPr>
-            <a:spLocks noGrp="1"/>
-          </p:cNvSpPr>
-          <p:nvPr>
-            <p:ph idx="1"/>
-          </p:nvPr>
-        </p:nvSpPr>
-        <p:spPr/>
-        <p:txBody>
-          <a:bodyPr>
-            <a:normAutofit/>
-          </a:bodyPr>
-          <a:lstStyle/>
-          <a:p>
-            <a:pPr marL="0" lvl="0" indent="0">
-              <a:buNone/>
-            </a:pPr>
-            <a:endParaRPr lang="en-US" altLang="zh-CN" dirty="0" smtClean="0"/>
-          </a:p>
-        </p:txBody>
-      </p:sp>
-    </p:spTree>
-    <p:extLst>
-      <p:ext uri="{BB962C8B-B14F-4D97-AF65-F5344CB8AC3E}">
-        <p14:creationId xmlns:p14="http://schemas.microsoft.com/office/powerpoint/2010/main" val="2405949957"/>
       </p:ext>
     </p:extLst>
   </p:cSld>
